--- a/prograaa.pptx
+++ b/prograaa.pptx
@@ -1,22 +1,22 @@
 
 <file path=ppt/presentation.xml><?xml version="1.0" encoding="utf-8"?>
-<p:presentation xmlns:a="http://schemas.openxmlformats.org/drawingml/2006/main" xmlns:r="http://schemas.openxmlformats.org/officeDocument/2006/relationships" xmlns:p="http://schemas.openxmlformats.org/presentationml/2006/main" saveSubsetFonts="1" embedTrueTypeFonts="true">
+<p:presentation xmlns:a="http://schemas.openxmlformats.org/drawingml/2006/main" xmlns:r="http://schemas.openxmlformats.org/officeDocument/2006/relationships" xmlns:p="http://schemas.openxmlformats.org/presentationml/2006/main" embedTrueTypeFonts="1" saveSubsetFonts="1">
   <p:sldMasterIdLst>
     <p:sldMasterId id="2147483648" r:id="rId1"/>
   </p:sldMasterIdLst>
   <p:sldIdLst>
-    <p:sldId id="256" r:id="rId6"/>
-    <p:sldId id="257" r:id="rId7"/>
-    <p:sldId id="258" r:id="rId8"/>
-    <p:sldId id="259" r:id="rId9"/>
-    <p:sldId id="260" r:id="rId10"/>
+    <p:sldId id="256" r:id="rId2"/>
+    <p:sldId id="257" r:id="rId3"/>
+    <p:sldId id="258" r:id="rId4"/>
+    <p:sldId id="259" r:id="rId5"/>
+    <p:sldId id="260" r:id="rId6"/>
   </p:sldIdLst>
   <p:sldSz cx="18288000" cy="10287000"/>
   <p:notesSz cx="6858000" cy="9144000"/>
   <p:embeddedFontLst>
     <p:embeddedFont>
-      <p:font typeface="Courier Prime" charset="1" panose="00000509000000000000"/>
-      <p:regular r:id="rId11"/>
+      <p:font typeface="Courier Prime" panose="020B0604020202020204" charset="0"/>
+      <p:regular r:id="rId7"/>
     </p:embeddedFont>
   </p:embeddedFontLst>
   <p:defaultTextStyle>
@@ -114,6 +114,22 @@
       </a:defRPr>
     </a:lvl9pPr>
   </p:defaultTextStyle>
+  <p:extLst>
+    <p:ext uri="{EFAFB233-063F-42B5-8137-9DF3F51BA10A}">
+      <p15:sldGuideLst xmlns:p15="http://schemas.microsoft.com/office/powerpoint/2012/main">
+        <p15:guide id="1" orient="horz" pos="2160">
+          <p15:clr>
+            <a:srgbClr val="A4A3A4"/>
+          </p15:clr>
+        </p15:guide>
+        <p15:guide id="2" pos="2880">
+          <p15:clr>
+            <a:srgbClr val="A4A3A4"/>
+          </p15:clr>
+        </p15:guide>
+      </p15:sldGuideLst>
+    </p:ext>
+  </p:extLst>
 </p:presentation>
 </file>
 
@@ -155,10 +171,9 @@
           <a:lstStyle/>
           <a:p>
             <a:r>
-              <a:rPr lang="en-US" smtClean="0"/>
+              <a:rPr lang="en-US"/>
               <a:t>Click to edit Master title style</a:t>
             </a:r>
-            <a:endParaRPr lang="en-US"/>
           </a:p>
         </p:txBody>
       </p:sp>
@@ -274,10 +289,9 @@
           </a:lstStyle>
           <a:p>
             <a:r>
-              <a:rPr lang="en-US" smtClean="0"/>
+              <a:rPr lang="en-US"/>
               <a:t>Click to edit Master subtitle style</a:t>
             </a:r>
-            <a:endParaRPr lang="en-US"/>
           </a:p>
         </p:txBody>
       </p:sp>
@@ -299,7 +313,7 @@
             <a:fld id="{1D8BD707-D9CF-40AE-B4C6-C98DA3205C09}" type="datetimeFigureOut">
               <a:rPr lang="en-US" smtClean="0"/>
               <a:pPr/>
-              <a:t>8/1/2011</a:t>
+              <a:t>6/28/2026</a:t>
             </a:fld>
             <a:endParaRPr lang="en-US"/>
           </a:p>
@@ -342,7 +356,7 @@
             <a:fld id="{B6F15528-21DE-4FAA-801E-634DDDAF4B2B}" type="slidenum">
               <a:rPr lang="en-US" smtClean="0"/>
               <a:pPr/>
-              <a:t>‹#›</a:t>
+              <a:t>‹Nº›</a:t>
             </a:fld>
             <a:endParaRPr lang="en-US"/>
           </a:p>
@@ -389,10 +403,9 @@
           <a:lstStyle/>
           <a:p>
             <a:r>
-              <a:rPr lang="en-US" smtClean="0"/>
+              <a:rPr lang="en-US"/>
               <a:t>Click to edit Master title style</a:t>
             </a:r>
-            <a:endParaRPr lang="en-US"/>
           </a:p>
         </p:txBody>
       </p:sp>
@@ -413,38 +426,37 @@
           <a:p>
             <a:pPr lvl="0"/>
             <a:r>
-              <a:rPr lang="en-US" smtClean="0"/>
+              <a:rPr lang="en-US"/>
               <a:t>Click to edit Master text styles</a:t>
             </a:r>
           </a:p>
           <a:p>
             <a:pPr lvl="1"/>
             <a:r>
-              <a:rPr lang="en-US" smtClean="0"/>
+              <a:rPr lang="en-US"/>
               <a:t>Second level</a:t>
             </a:r>
           </a:p>
           <a:p>
             <a:pPr lvl="2"/>
             <a:r>
-              <a:rPr lang="en-US" smtClean="0"/>
+              <a:rPr lang="en-US"/>
               <a:t>Third level</a:t>
             </a:r>
           </a:p>
           <a:p>
             <a:pPr lvl="3"/>
             <a:r>
-              <a:rPr lang="en-US" smtClean="0"/>
+              <a:rPr lang="en-US"/>
               <a:t>Fourth level</a:t>
             </a:r>
           </a:p>
           <a:p>
             <a:pPr lvl="4"/>
             <a:r>
-              <a:rPr lang="en-US" smtClean="0"/>
+              <a:rPr lang="en-US"/>
               <a:t>Fifth level</a:t>
             </a:r>
-            <a:endParaRPr lang="en-US"/>
           </a:p>
         </p:txBody>
       </p:sp>
@@ -466,7 +478,7 @@
             <a:fld id="{1D8BD707-D9CF-40AE-B4C6-C98DA3205C09}" type="datetimeFigureOut">
               <a:rPr lang="en-US" smtClean="0"/>
               <a:pPr/>
-              <a:t>8/1/2011</a:t>
+              <a:t>6/28/2026</a:t>
             </a:fld>
             <a:endParaRPr lang="en-US"/>
           </a:p>
@@ -509,7 +521,7 @@
             <a:fld id="{B6F15528-21DE-4FAA-801E-634DDDAF4B2B}" type="slidenum">
               <a:rPr lang="en-US" smtClean="0"/>
               <a:pPr/>
-              <a:t>‹#›</a:t>
+              <a:t>‹Nº›</a:t>
             </a:fld>
             <a:endParaRPr lang="en-US"/>
           </a:p>
@@ -561,10 +573,9 @@
           <a:lstStyle/>
           <a:p>
             <a:r>
-              <a:rPr lang="en-US" smtClean="0"/>
+              <a:rPr lang="en-US"/>
               <a:t>Click to edit Master title style</a:t>
             </a:r>
-            <a:endParaRPr lang="en-US"/>
           </a:p>
         </p:txBody>
       </p:sp>
@@ -590,38 +601,37 @@
           <a:p>
             <a:pPr lvl="0"/>
             <a:r>
-              <a:rPr lang="en-US" smtClean="0"/>
+              <a:rPr lang="en-US"/>
               <a:t>Click to edit Master text styles</a:t>
             </a:r>
           </a:p>
           <a:p>
             <a:pPr lvl="1"/>
             <a:r>
-              <a:rPr lang="en-US" smtClean="0"/>
+              <a:rPr lang="en-US"/>
               <a:t>Second level</a:t>
             </a:r>
           </a:p>
           <a:p>
             <a:pPr lvl="2"/>
             <a:r>
-              <a:rPr lang="en-US" smtClean="0"/>
+              <a:rPr lang="en-US"/>
               <a:t>Third level</a:t>
             </a:r>
           </a:p>
           <a:p>
             <a:pPr lvl="3"/>
             <a:r>
-              <a:rPr lang="en-US" smtClean="0"/>
+              <a:rPr lang="en-US"/>
               <a:t>Fourth level</a:t>
             </a:r>
           </a:p>
           <a:p>
             <a:pPr lvl="4"/>
             <a:r>
-              <a:rPr lang="en-US" smtClean="0"/>
+              <a:rPr lang="en-US"/>
               <a:t>Fifth level</a:t>
             </a:r>
-            <a:endParaRPr lang="en-US"/>
           </a:p>
         </p:txBody>
       </p:sp>
@@ -643,7 +653,7 @@
             <a:fld id="{1D8BD707-D9CF-40AE-B4C6-C98DA3205C09}" type="datetimeFigureOut">
               <a:rPr lang="en-US" smtClean="0"/>
               <a:pPr/>
-              <a:t>8/1/2011</a:t>
+              <a:t>6/28/2026</a:t>
             </a:fld>
             <a:endParaRPr lang="en-US"/>
           </a:p>
@@ -686,7 +696,7 @@
             <a:fld id="{B6F15528-21DE-4FAA-801E-634DDDAF4B2B}" type="slidenum">
               <a:rPr lang="en-US" smtClean="0"/>
               <a:pPr/>
-              <a:t>‹#›</a:t>
+              <a:t>‹Nº›</a:t>
             </a:fld>
             <a:endParaRPr lang="en-US"/>
           </a:p>
@@ -733,10 +743,9 @@
           <a:lstStyle/>
           <a:p>
             <a:r>
-              <a:rPr lang="en-US" smtClean="0"/>
+              <a:rPr lang="en-US"/>
               <a:t>Click to edit Master title style</a:t>
             </a:r>
-            <a:endParaRPr lang="en-US"/>
           </a:p>
         </p:txBody>
       </p:sp>
@@ -757,38 +766,37 @@
           <a:p>
             <a:pPr lvl="0"/>
             <a:r>
-              <a:rPr lang="en-US" smtClean="0"/>
+              <a:rPr lang="en-US"/>
               <a:t>Click to edit Master text styles</a:t>
             </a:r>
           </a:p>
           <a:p>
             <a:pPr lvl="1"/>
             <a:r>
-              <a:rPr lang="en-US" smtClean="0"/>
+              <a:rPr lang="en-US"/>
               <a:t>Second level</a:t>
             </a:r>
           </a:p>
           <a:p>
             <a:pPr lvl="2"/>
             <a:r>
-              <a:rPr lang="en-US" smtClean="0"/>
+              <a:rPr lang="en-US"/>
               <a:t>Third level</a:t>
             </a:r>
           </a:p>
           <a:p>
             <a:pPr lvl="3"/>
             <a:r>
-              <a:rPr lang="en-US" smtClean="0"/>
+              <a:rPr lang="en-US"/>
               <a:t>Fourth level</a:t>
             </a:r>
           </a:p>
           <a:p>
             <a:pPr lvl="4"/>
             <a:r>
-              <a:rPr lang="en-US" smtClean="0"/>
+              <a:rPr lang="en-US"/>
               <a:t>Fifth level</a:t>
             </a:r>
-            <a:endParaRPr lang="en-US"/>
           </a:p>
         </p:txBody>
       </p:sp>
@@ -810,7 +818,7 @@
             <a:fld id="{1D8BD707-D9CF-40AE-B4C6-C98DA3205C09}" type="datetimeFigureOut">
               <a:rPr lang="en-US" smtClean="0"/>
               <a:pPr/>
-              <a:t>8/1/2011</a:t>
+              <a:t>6/28/2026</a:t>
             </a:fld>
             <a:endParaRPr lang="en-US"/>
           </a:p>
@@ -853,7 +861,7 @@
             <a:fld id="{B6F15528-21DE-4FAA-801E-634DDDAF4B2B}" type="slidenum">
               <a:rPr lang="en-US" smtClean="0"/>
               <a:pPr/>
-              <a:t>‹#›</a:t>
+              <a:t>‹Nº›</a:t>
             </a:fld>
             <a:endParaRPr lang="en-US"/>
           </a:p>
@@ -909,10 +917,9 @@
           </a:lstStyle>
           <a:p>
             <a:r>
-              <a:rPr lang="en-US" smtClean="0"/>
+              <a:rPr lang="en-US"/>
               <a:t>Click to edit Master title style</a:t>
             </a:r>
-            <a:endParaRPr lang="en-US"/>
           </a:p>
         </p:txBody>
       </p:sp>
@@ -1029,7 +1036,7 @@
           <a:p>
             <a:pPr lvl="0"/>
             <a:r>
-              <a:rPr lang="en-US" smtClean="0"/>
+              <a:rPr lang="en-US"/>
               <a:t>Click to edit Master text styles</a:t>
             </a:r>
           </a:p>
@@ -1053,7 +1060,7 @@
             <a:fld id="{1D8BD707-D9CF-40AE-B4C6-C98DA3205C09}" type="datetimeFigureOut">
               <a:rPr lang="en-US" smtClean="0"/>
               <a:pPr/>
-              <a:t>8/1/2011</a:t>
+              <a:t>6/28/2026</a:t>
             </a:fld>
             <a:endParaRPr lang="en-US"/>
           </a:p>
@@ -1096,7 +1103,7 @@
             <a:fld id="{B6F15528-21DE-4FAA-801E-634DDDAF4B2B}" type="slidenum">
               <a:rPr lang="en-US" smtClean="0"/>
               <a:pPr/>
-              <a:t>‹#›</a:t>
+              <a:t>‹Nº›</a:t>
             </a:fld>
             <a:endParaRPr lang="en-US"/>
           </a:p>
@@ -1143,10 +1150,9 @@
           <a:lstStyle/>
           <a:p>
             <a:r>
-              <a:rPr lang="en-US" smtClean="0"/>
+              <a:rPr lang="en-US"/>
               <a:t>Click to edit Master title style</a:t>
             </a:r>
-            <a:endParaRPr lang="en-US"/>
           </a:p>
         </p:txBody>
       </p:sp>
@@ -1200,38 +1206,37 @@
           <a:p>
             <a:pPr lvl="0"/>
             <a:r>
-              <a:rPr lang="en-US" smtClean="0"/>
+              <a:rPr lang="en-US"/>
               <a:t>Click to edit Master text styles</a:t>
             </a:r>
           </a:p>
           <a:p>
             <a:pPr lvl="1"/>
             <a:r>
-              <a:rPr lang="en-US" smtClean="0"/>
+              <a:rPr lang="en-US"/>
               <a:t>Second level</a:t>
             </a:r>
           </a:p>
           <a:p>
             <a:pPr lvl="2"/>
             <a:r>
-              <a:rPr lang="en-US" smtClean="0"/>
+              <a:rPr lang="en-US"/>
               <a:t>Third level</a:t>
             </a:r>
           </a:p>
           <a:p>
             <a:pPr lvl="3"/>
             <a:r>
-              <a:rPr lang="en-US" smtClean="0"/>
+              <a:rPr lang="en-US"/>
               <a:t>Fourth level</a:t>
             </a:r>
           </a:p>
           <a:p>
             <a:pPr lvl="4"/>
             <a:r>
-              <a:rPr lang="en-US" smtClean="0"/>
+              <a:rPr lang="en-US"/>
               <a:t>Fifth level</a:t>
             </a:r>
-            <a:endParaRPr lang="en-US"/>
           </a:p>
         </p:txBody>
       </p:sp>
@@ -1285,38 +1290,37 @@
           <a:p>
             <a:pPr lvl="0"/>
             <a:r>
-              <a:rPr lang="en-US" smtClean="0"/>
+              <a:rPr lang="en-US"/>
               <a:t>Click to edit Master text styles</a:t>
             </a:r>
           </a:p>
           <a:p>
             <a:pPr lvl="1"/>
             <a:r>
-              <a:rPr lang="en-US" smtClean="0"/>
+              <a:rPr lang="en-US"/>
               <a:t>Second level</a:t>
             </a:r>
           </a:p>
           <a:p>
             <a:pPr lvl="2"/>
             <a:r>
-              <a:rPr lang="en-US" smtClean="0"/>
+              <a:rPr lang="en-US"/>
               <a:t>Third level</a:t>
             </a:r>
           </a:p>
           <a:p>
             <a:pPr lvl="3"/>
             <a:r>
-              <a:rPr lang="en-US" smtClean="0"/>
+              <a:rPr lang="en-US"/>
               <a:t>Fourth level</a:t>
             </a:r>
           </a:p>
           <a:p>
             <a:pPr lvl="4"/>
             <a:r>
-              <a:rPr lang="en-US" smtClean="0"/>
+              <a:rPr lang="en-US"/>
               <a:t>Fifth level</a:t>
             </a:r>
-            <a:endParaRPr lang="en-US"/>
           </a:p>
         </p:txBody>
       </p:sp>
@@ -1338,7 +1342,7 @@
             <a:fld id="{1D8BD707-D9CF-40AE-B4C6-C98DA3205C09}" type="datetimeFigureOut">
               <a:rPr lang="en-US" smtClean="0"/>
               <a:pPr/>
-              <a:t>8/1/2011</a:t>
+              <a:t>6/28/2026</a:t>
             </a:fld>
             <a:endParaRPr lang="en-US"/>
           </a:p>
@@ -1381,7 +1385,7 @@
             <a:fld id="{B6F15528-21DE-4FAA-801E-634DDDAF4B2B}" type="slidenum">
               <a:rPr lang="en-US" smtClean="0"/>
               <a:pPr/>
-              <a:t>‹#›</a:t>
+              <a:t>‹Nº›</a:t>
             </a:fld>
             <a:endParaRPr lang="en-US"/>
           </a:p>
@@ -1432,10 +1436,9 @@
           </a:lstStyle>
           <a:p>
             <a:r>
-              <a:rPr lang="en-US" smtClean="0"/>
+              <a:rPr lang="en-US"/>
               <a:t>Click to edit Master title style</a:t>
             </a:r>
-            <a:endParaRPr lang="en-US"/>
           </a:p>
         </p:txBody>
       </p:sp>
@@ -1498,7 +1501,7 @@
           <a:p>
             <a:pPr lvl="0"/>
             <a:r>
-              <a:rPr lang="en-US" smtClean="0"/>
+              <a:rPr lang="en-US"/>
               <a:t>Click to edit Master text styles</a:t>
             </a:r>
           </a:p>
@@ -1554,38 +1557,37 @@
           <a:p>
             <a:pPr lvl="0"/>
             <a:r>
-              <a:rPr lang="en-US" smtClean="0"/>
+              <a:rPr lang="en-US"/>
               <a:t>Click to edit Master text styles</a:t>
             </a:r>
           </a:p>
           <a:p>
             <a:pPr lvl="1"/>
             <a:r>
-              <a:rPr lang="en-US" smtClean="0"/>
+              <a:rPr lang="en-US"/>
               <a:t>Second level</a:t>
             </a:r>
           </a:p>
           <a:p>
             <a:pPr lvl="2"/>
             <a:r>
-              <a:rPr lang="en-US" smtClean="0"/>
+              <a:rPr lang="en-US"/>
               <a:t>Third level</a:t>
             </a:r>
           </a:p>
           <a:p>
             <a:pPr lvl="3"/>
             <a:r>
-              <a:rPr lang="en-US" smtClean="0"/>
+              <a:rPr lang="en-US"/>
               <a:t>Fourth level</a:t>
             </a:r>
           </a:p>
           <a:p>
             <a:pPr lvl="4"/>
             <a:r>
-              <a:rPr lang="en-US" smtClean="0"/>
+              <a:rPr lang="en-US"/>
               <a:t>Fifth level</a:t>
             </a:r>
-            <a:endParaRPr lang="en-US"/>
           </a:p>
         </p:txBody>
       </p:sp>
@@ -1648,7 +1650,7 @@
           <a:p>
             <a:pPr lvl="0"/>
             <a:r>
-              <a:rPr lang="en-US" smtClean="0"/>
+              <a:rPr lang="en-US"/>
               <a:t>Click to edit Master text styles</a:t>
             </a:r>
           </a:p>
@@ -1704,38 +1706,37 @@
           <a:p>
             <a:pPr lvl="0"/>
             <a:r>
-              <a:rPr lang="en-US" smtClean="0"/>
+              <a:rPr lang="en-US"/>
               <a:t>Click to edit Master text styles</a:t>
             </a:r>
           </a:p>
           <a:p>
             <a:pPr lvl="1"/>
             <a:r>
-              <a:rPr lang="en-US" smtClean="0"/>
+              <a:rPr lang="en-US"/>
               <a:t>Second level</a:t>
             </a:r>
           </a:p>
           <a:p>
             <a:pPr lvl="2"/>
             <a:r>
-              <a:rPr lang="en-US" smtClean="0"/>
+              <a:rPr lang="en-US"/>
               <a:t>Third level</a:t>
             </a:r>
           </a:p>
           <a:p>
             <a:pPr lvl="3"/>
             <a:r>
-              <a:rPr lang="en-US" smtClean="0"/>
+              <a:rPr lang="en-US"/>
               <a:t>Fourth level</a:t>
             </a:r>
           </a:p>
           <a:p>
             <a:pPr lvl="4"/>
             <a:r>
-              <a:rPr lang="en-US" smtClean="0"/>
+              <a:rPr lang="en-US"/>
               <a:t>Fifth level</a:t>
             </a:r>
-            <a:endParaRPr lang="en-US"/>
           </a:p>
         </p:txBody>
       </p:sp>
@@ -1757,7 +1758,7 @@
             <a:fld id="{1D8BD707-D9CF-40AE-B4C6-C98DA3205C09}" type="datetimeFigureOut">
               <a:rPr lang="en-US" smtClean="0"/>
               <a:pPr/>
-              <a:t>8/1/2011</a:t>
+              <a:t>6/28/2026</a:t>
             </a:fld>
             <a:endParaRPr lang="en-US"/>
           </a:p>
@@ -1800,7 +1801,7 @@
             <a:fld id="{B6F15528-21DE-4FAA-801E-634DDDAF4B2B}" type="slidenum">
               <a:rPr lang="en-US" smtClean="0"/>
               <a:pPr/>
-              <a:t>‹#›</a:t>
+              <a:t>‹Nº›</a:t>
             </a:fld>
             <a:endParaRPr lang="en-US"/>
           </a:p>
@@ -1847,10 +1848,9 @@
           <a:lstStyle/>
           <a:p>
             <a:r>
-              <a:rPr lang="en-US" smtClean="0"/>
+              <a:rPr lang="en-US"/>
               <a:t>Click to edit Master title style</a:t>
             </a:r>
-            <a:endParaRPr lang="en-US"/>
           </a:p>
         </p:txBody>
       </p:sp>
@@ -1872,7 +1872,7 @@
             <a:fld id="{1D8BD707-D9CF-40AE-B4C6-C98DA3205C09}" type="datetimeFigureOut">
               <a:rPr lang="en-US" smtClean="0"/>
               <a:pPr/>
-              <a:t>8/1/2011</a:t>
+              <a:t>6/28/2026</a:t>
             </a:fld>
             <a:endParaRPr lang="en-US"/>
           </a:p>
@@ -1915,7 +1915,7 @@
             <a:fld id="{B6F15528-21DE-4FAA-801E-634DDDAF4B2B}" type="slidenum">
               <a:rPr lang="en-US" smtClean="0"/>
               <a:pPr/>
-              <a:t>‹#›</a:t>
+              <a:t>‹Nº›</a:t>
             </a:fld>
             <a:endParaRPr lang="en-US"/>
           </a:p>
@@ -1964,7 +1964,7 @@
             <a:fld id="{1D8BD707-D9CF-40AE-B4C6-C98DA3205C09}" type="datetimeFigureOut">
               <a:rPr lang="en-US" smtClean="0"/>
               <a:pPr/>
-              <a:t>8/1/2011</a:t>
+              <a:t>6/28/2026</a:t>
             </a:fld>
             <a:endParaRPr lang="en-US"/>
           </a:p>
@@ -2007,7 +2007,7 @@
             <a:fld id="{B6F15528-21DE-4FAA-801E-634DDDAF4B2B}" type="slidenum">
               <a:rPr lang="en-US" smtClean="0"/>
               <a:pPr/>
-              <a:t>‹#›</a:t>
+              <a:t>‹Nº›</a:t>
             </a:fld>
             <a:endParaRPr lang="en-US"/>
           </a:p>
@@ -2063,10 +2063,9 @@
           </a:lstStyle>
           <a:p>
             <a:r>
-              <a:rPr lang="en-US" smtClean="0"/>
+              <a:rPr lang="en-US"/>
               <a:t>Click to edit Master title style</a:t>
             </a:r>
-            <a:endParaRPr lang="en-US"/>
           </a:p>
         </p:txBody>
       </p:sp>
@@ -2120,38 +2119,37 @@
           <a:p>
             <a:pPr lvl="0"/>
             <a:r>
-              <a:rPr lang="en-US" smtClean="0"/>
+              <a:rPr lang="en-US"/>
               <a:t>Click to edit Master text styles</a:t>
             </a:r>
           </a:p>
           <a:p>
             <a:pPr lvl="1"/>
             <a:r>
-              <a:rPr lang="en-US" smtClean="0"/>
+              <a:rPr lang="en-US"/>
               <a:t>Second level</a:t>
             </a:r>
           </a:p>
           <a:p>
             <a:pPr lvl="2"/>
             <a:r>
-              <a:rPr lang="en-US" smtClean="0"/>
+              <a:rPr lang="en-US"/>
               <a:t>Third level</a:t>
             </a:r>
           </a:p>
           <a:p>
             <a:pPr lvl="3"/>
             <a:r>
-              <a:rPr lang="en-US" smtClean="0"/>
+              <a:rPr lang="en-US"/>
               <a:t>Fourth level</a:t>
             </a:r>
           </a:p>
           <a:p>
             <a:pPr lvl="4"/>
             <a:r>
-              <a:rPr lang="en-US" smtClean="0"/>
+              <a:rPr lang="en-US"/>
               <a:t>Fifth level</a:t>
             </a:r>
-            <a:endParaRPr lang="en-US"/>
           </a:p>
         </p:txBody>
       </p:sp>
@@ -2214,7 +2212,7 @@
           <a:p>
             <a:pPr lvl="0"/>
             <a:r>
-              <a:rPr lang="en-US" smtClean="0"/>
+              <a:rPr lang="en-US"/>
               <a:t>Click to edit Master text styles</a:t>
             </a:r>
           </a:p>
@@ -2238,7 +2236,7 @@
             <a:fld id="{1D8BD707-D9CF-40AE-B4C6-C98DA3205C09}" type="datetimeFigureOut">
               <a:rPr lang="en-US" smtClean="0"/>
               <a:pPr/>
-              <a:t>8/1/2011</a:t>
+              <a:t>6/28/2026</a:t>
             </a:fld>
             <a:endParaRPr lang="en-US"/>
           </a:p>
@@ -2281,7 +2279,7 @@
             <a:fld id="{B6F15528-21DE-4FAA-801E-634DDDAF4B2B}" type="slidenum">
               <a:rPr lang="en-US" smtClean="0"/>
               <a:pPr/>
-              <a:t>‹#›</a:t>
+              <a:t>‹Nº›</a:t>
             </a:fld>
             <a:endParaRPr lang="en-US"/>
           </a:p>
@@ -2337,10 +2335,9 @@
           </a:lstStyle>
           <a:p>
             <a:r>
-              <a:rPr lang="en-US" smtClean="0"/>
+              <a:rPr lang="en-US"/>
               <a:t>Click to edit Master title style</a:t>
             </a:r>
-            <a:endParaRPr lang="en-US"/>
           </a:p>
         </p:txBody>
       </p:sp>
@@ -2464,7 +2461,7 @@
           <a:p>
             <a:pPr lvl="0"/>
             <a:r>
-              <a:rPr lang="en-US" smtClean="0"/>
+              <a:rPr lang="en-US"/>
               <a:t>Click to edit Master text styles</a:t>
             </a:r>
           </a:p>
@@ -2488,7 +2485,7 @@
             <a:fld id="{1D8BD707-D9CF-40AE-B4C6-C98DA3205C09}" type="datetimeFigureOut">
               <a:rPr lang="en-US" smtClean="0"/>
               <a:pPr/>
-              <a:t>8/1/2011</a:t>
+              <a:t>6/28/2026</a:t>
             </a:fld>
             <a:endParaRPr lang="en-US"/>
           </a:p>
@@ -2531,7 +2528,7 @@
             <a:fld id="{B6F15528-21DE-4FAA-801E-634DDDAF4B2B}" type="slidenum">
               <a:rPr lang="en-US" smtClean="0"/>
               <a:pPr/>
-              <a:t>‹#›</a:t>
+              <a:t>‹Nº›</a:t>
             </a:fld>
             <a:endParaRPr lang="en-US"/>
           </a:p>
@@ -2593,10 +2590,9 @@
           <a:lstStyle/>
           <a:p>
             <a:r>
-              <a:rPr lang="en-US" smtClean="0"/>
+              <a:rPr lang="en-US"/>
               <a:t>Click to edit Master title style</a:t>
             </a:r>
-            <a:endParaRPr lang="en-US"/>
           </a:p>
         </p:txBody>
       </p:sp>
@@ -2627,38 +2623,37 @@
           <a:p>
             <a:pPr lvl="0"/>
             <a:r>
-              <a:rPr lang="en-US" smtClean="0"/>
+              <a:rPr lang="en-US"/>
               <a:t>Click to edit Master text styles</a:t>
             </a:r>
           </a:p>
           <a:p>
             <a:pPr lvl="1"/>
             <a:r>
-              <a:rPr lang="en-US" smtClean="0"/>
+              <a:rPr lang="en-US"/>
               <a:t>Second level</a:t>
             </a:r>
           </a:p>
           <a:p>
             <a:pPr lvl="2"/>
             <a:r>
-              <a:rPr lang="en-US" smtClean="0"/>
+              <a:rPr lang="en-US"/>
               <a:t>Third level</a:t>
             </a:r>
           </a:p>
           <a:p>
             <a:pPr lvl="3"/>
             <a:r>
-              <a:rPr lang="en-US" smtClean="0"/>
+              <a:rPr lang="en-US"/>
               <a:t>Fourth level</a:t>
             </a:r>
           </a:p>
           <a:p>
             <a:pPr lvl="4"/>
             <a:r>
-              <a:rPr lang="en-US" smtClean="0"/>
+              <a:rPr lang="en-US"/>
               <a:t>Fifth level</a:t>
             </a:r>
-            <a:endParaRPr lang="en-US"/>
           </a:p>
         </p:txBody>
       </p:sp>
@@ -2698,7 +2693,7 @@
             <a:fld id="{1D8BD707-D9CF-40AE-B4C6-C98DA3205C09}" type="datetimeFigureOut">
               <a:rPr lang="en-US" smtClean="0"/>
               <a:pPr/>
-              <a:t>8/1/2011</a:t>
+              <a:t>6/28/2026</a:t>
             </a:fld>
             <a:endParaRPr lang="en-US"/>
           </a:p>
@@ -2777,7 +2772,7 @@
             <a:fld id="{B6F15528-21DE-4FAA-801E-634DDDAF4B2B}" type="slidenum">
               <a:rPr lang="en-US" smtClean="0"/>
               <a:pPr/>
-              <a:t>‹#›</a:t>
+              <a:t>‹Nº›</a:t>
             </a:fld>
             <a:endParaRPr lang="en-US"/>
           </a:p>
@@ -3053,13 +3048,14 @@
 </file>
 
 <file path=ppt/slides/slide1.xml><?xml version="1.0" encoding="utf-8"?>
-<p:sld xmlns:p="http://schemas.openxmlformats.org/presentationml/2006/main" xmlns:a="http://schemas.openxmlformats.org/drawingml/2006/main" xmlns:r="http://schemas.openxmlformats.org/officeDocument/2006/relationships">
+<p:sld xmlns:a="http://schemas.openxmlformats.org/drawingml/2006/main" xmlns:r="http://schemas.openxmlformats.org/officeDocument/2006/relationships" xmlns:p="http://schemas.openxmlformats.org/presentationml/2006/main">
   <p:cSld>
     <p:bg>
       <p:bgPr>
         <a:solidFill>
           <a:srgbClr val="20232A"/>
         </a:solidFill>
+        <a:effectLst/>
       </p:bgPr>
     </p:bg>
     <p:spTree>
@@ -3078,26 +3074,26 @@
       </p:grpSpPr>
       <p:grpSp>
         <p:nvGrpSpPr>
-          <p:cNvPr name="Group 2" id="2"/>
+          <p:cNvPr id="2" name="Group 2"/>
           <p:cNvGrpSpPr/>
           <p:nvPr/>
         </p:nvGrpSpPr>
         <p:grpSpPr>
-          <a:xfrm rot="0">
-            <a:off x="14762002" y="-102870"/>
-            <a:ext cx="4230823" cy="10389870"/>
+          <a:xfrm>
+            <a:off x="14762003" y="-102870"/>
+            <a:ext cx="3525998" cy="10389870"/>
             <a:chOff x="0" y="0"/>
             <a:chExt cx="1543416" cy="3790253"/>
           </a:xfrm>
         </p:grpSpPr>
         <p:sp>
           <p:nvSpPr>
-            <p:cNvPr name="Freeform 3" id="3"/>
+            <p:cNvPr id="3" name="Freeform 3"/>
             <p:cNvSpPr/>
             <p:nvPr/>
           </p:nvSpPr>
           <p:spPr>
-            <a:xfrm flipH="false" flipV="false" rot="0">
+            <a:xfrm>
               <a:off x="0" y="0"/>
               <a:ext cx="1543416" cy="3790253"/>
             </a:xfrm>
@@ -3106,9 +3102,9 @@
               <a:gdLst/>
               <a:ahLst/>
               <a:cxnLst/>
-              <a:rect r="r" b="b" t="t" l="l"/>
+              <a:rect l="l" t="t" r="r" b="b"/>
               <a:pathLst>
-                <a:path h="3790253" w="1543416">
+                <a:path w="1543416" h="3790253">
                   <a:moveTo>
                     <a:pt x="0" y="0"/>
                   </a:moveTo>
@@ -3133,36 +3129,12 @@
       </p:grpSp>
       <p:sp>
         <p:nvSpPr>
-          <p:cNvPr name="AutoShape 4" id="4"/>
+          <p:cNvPr id="5" name="Freeform 5"/>
           <p:cNvSpPr/>
           <p:nvPr/>
         </p:nvSpPr>
         <p:spPr>
-          <a:xfrm rot="0">
-            <a:off x="14666595" y="9210675"/>
-            <a:ext cx="1539000" cy="0"/>
-          </a:xfrm>
-          <a:prstGeom prst="line">
-            <a:avLst/>
-          </a:prstGeom>
-          <a:ln cap="flat" w="47625">
-            <a:solidFill>
-              <a:srgbClr val="FFFFFF"/>
-            </a:solidFill>
-            <a:prstDash val="solid"/>
-            <a:headEnd type="diamond" len="lg" w="lg"/>
-            <a:tailEnd type="arrow" len="sm" w="med"/>
-          </a:ln>
-        </p:spPr>
-      </p:sp>
-      <p:sp>
-        <p:nvSpPr>
-          <p:cNvPr name="Freeform 5" id="5"/>
-          <p:cNvSpPr/>
-          <p:nvPr/>
-        </p:nvSpPr>
-        <p:spPr>
-          <a:xfrm flipH="false" flipV="false" rot="0">
+          <a:xfrm>
             <a:off x="17458581" y="205154"/>
             <a:ext cx="542051" cy="544066"/>
           </a:xfrm>
@@ -3171,9 +3143,9 @@
             <a:gdLst/>
             <a:ahLst/>
             <a:cxnLst/>
-            <a:rect r="r" b="b" t="t" l="l"/>
+            <a:rect l="l" t="t" r="r" b="b"/>
             <a:pathLst>
-              <a:path h="544066" w="542051">
+              <a:path w="542051" h="544066">
                 <a:moveTo>
                   <a:pt x="0" y="0"/>
                 </a:moveTo>
@@ -3196,28 +3168,28 @@
           <a:blipFill>
             <a:blip r:embed="rId2"/>
             <a:stretch>
-              <a:fillRect l="0" t="0" r="0" b="0"/>
+              <a:fillRect/>
             </a:stretch>
           </a:blipFill>
         </p:spPr>
       </p:sp>
       <p:sp>
         <p:nvSpPr>
-          <p:cNvPr name="TextBox 6" id="6"/>
-          <p:cNvSpPr txBox="true"/>
+          <p:cNvPr id="6" name="TextBox 6"/>
+          <p:cNvSpPr txBox="1"/>
           <p:nvPr/>
         </p:nvSpPr>
         <p:spPr>
-          <a:xfrm rot="0">
+          <a:xfrm>
             <a:off x="2278912" y="2676000"/>
-            <a:ext cx="7599700" cy="2559669"/>
+            <a:ext cx="7599700" cy="2590324"/>
           </a:xfrm>
           <a:prstGeom prst="rect">
             <a:avLst/>
           </a:prstGeom>
         </p:spPr>
         <p:txBody>
-          <a:bodyPr anchor="t" rtlCol="false" tIns="0" lIns="0" bIns="0" rIns="0">
+          <a:bodyPr lIns="0" tIns="0" rIns="0" bIns="0" rtlCol="0" anchor="t">
             <a:spAutoFit/>
           </a:bodyPr>
           <a:lstStyle/>
@@ -3228,78 +3200,37 @@
               </a:lnSpc>
             </a:pPr>
             <a:r>
-              <a:rPr lang="en-US" sz="5914">
-                <a:solidFill>
-                  <a:srgbClr val="FFFFFF"/>
-                </a:solidFill>
-                <a:latin typeface="Courier Prime"/>
-                <a:ea typeface="Courier Prime"/>
-                <a:cs typeface="Courier Prime"/>
-                <a:sym typeface="Courier Prime"/>
-              </a:rPr>
-              <a:t>EDITOR DE FONDOS PARA IMÁGENES DIGITALES{</a:t>
-            </a:r>
-          </a:p>
-        </p:txBody>
-      </p:sp>
-      <p:sp>
-        <p:nvSpPr>
-          <p:cNvPr name="TextBox 7" id="7"/>
-          <p:cNvSpPr txBox="true"/>
+              <a:rPr lang="en-US" sz="5914" dirty="0">
+                <a:solidFill>
+                  <a:srgbClr val="FFFFFF"/>
+                </a:solidFill>
+                <a:latin typeface="Courier Prime"/>
+                <a:ea typeface="Courier Prime"/>
+                <a:cs typeface="Courier Prime"/>
+                <a:sym typeface="Courier Prime"/>
+              </a:rPr>
+              <a:t>EDITOR DE FONDOS PARA IMÁGENES DIGITALES</a:t>
+            </a:r>
+          </a:p>
+        </p:txBody>
+      </p:sp>
+      <p:sp>
+        <p:nvSpPr>
+          <p:cNvPr id="8" name="TextBox 8"/>
+          <p:cNvSpPr txBox="1"/>
           <p:nvPr/>
         </p:nvSpPr>
         <p:spPr>
-          <a:xfrm rot="0">
-            <a:off x="2220535" y="7017818"/>
-            <a:ext cx="2373735" cy="1146184"/>
+          <a:xfrm>
+            <a:off x="2194891" y="5359521"/>
+            <a:ext cx="8212073" cy="2269852"/>
           </a:xfrm>
           <a:prstGeom prst="rect">
             <a:avLst/>
           </a:prstGeom>
         </p:spPr>
         <p:txBody>
-          <a:bodyPr anchor="t" rtlCol="false" tIns="0" lIns="0" bIns="0" rIns="0">
-            <a:spAutoFit/>
-          </a:bodyPr>
-          <a:lstStyle/>
-          <a:p>
-            <a:pPr algn="l">
-              <a:lnSpc>
-                <a:spcPts val="8866"/>
-              </a:lnSpc>
-            </a:pPr>
-            <a:r>
-              <a:rPr lang="en-US" sz="7777">
-                <a:solidFill>
-                  <a:srgbClr val="FFFFFF"/>
-                </a:solidFill>
-                <a:latin typeface="Courier Prime"/>
-                <a:ea typeface="Courier Prime"/>
-                <a:cs typeface="Courier Prime"/>
-                <a:sym typeface="Courier Prime"/>
-              </a:rPr>
-              <a:t>}</a:t>
-            </a:r>
-          </a:p>
-        </p:txBody>
-      </p:sp>
-      <p:sp>
-        <p:nvSpPr>
-          <p:cNvPr name="TextBox 8" id="8"/>
-          <p:cNvSpPr txBox="true"/>
-          <p:nvPr/>
-        </p:nvSpPr>
-        <p:spPr>
-          <a:xfrm rot="0">
-            <a:off x="2194891" y="5359521"/>
-            <a:ext cx="8212073" cy="1464945"/>
-          </a:xfrm>
-          <a:prstGeom prst="rect">
-            <a:avLst/>
-          </a:prstGeom>
-        </p:spPr>
-        <p:txBody>
-          <a:bodyPr anchor="t" rtlCol="false" tIns="0" lIns="0" bIns="0" rIns="0">
+          <a:bodyPr lIns="0" tIns="0" rIns="0" bIns="0" rtlCol="0" anchor="t">
             <a:spAutoFit/>
           </a:bodyPr>
           <a:lstStyle/>
@@ -3310,7 +3241,7 @@
               </a:lnSpc>
             </a:pPr>
             <a:r>
-              <a:rPr lang="en-US" sz="4200">
+              <a:rPr lang="en-US" sz="4200" dirty="0">
                 <a:solidFill>
                   <a:srgbClr val="FF914D"/>
                 </a:solidFill>
@@ -3319,7 +3250,7 @@
                 <a:cs typeface="Courier Prime"/>
                 <a:sym typeface="Courier Prime"/>
               </a:rPr>
-              <a:t>&lt;Por="Vicente Huilcamán",</a:t>
+              <a:t>INTEGRANTES:</a:t>
             </a:r>
           </a:p>
           <a:p>
@@ -3329,7 +3260,7 @@
               </a:lnSpc>
             </a:pPr>
             <a:r>
-              <a:rPr lang="en-US" sz="4200">
+              <a:rPr lang="en-US" sz="4200" dirty="0">
                 <a:solidFill>
                   <a:srgbClr val="FF914D"/>
                 </a:solidFill>
@@ -3338,19 +3269,59 @@
                 <a:cs typeface="Courier Prime"/>
                 <a:sym typeface="Courier Prime"/>
               </a:rPr>
-              <a:t>”Benjamín Pedraza/&gt;</a:t>
-            </a:r>
-          </a:p>
-        </p:txBody>
-      </p:sp>
-      <p:sp>
-        <p:nvSpPr>
-          <p:cNvPr name="TextBox 9" id="9"/>
-          <p:cNvSpPr txBox="true"/>
+              <a:t>Vicente </a:t>
+            </a:r>
+            <a:r>
+              <a:rPr lang="en-US" sz="4200" dirty="0" err="1">
+                <a:solidFill>
+                  <a:srgbClr val="FF914D"/>
+                </a:solidFill>
+                <a:latin typeface="Courier Prime"/>
+                <a:ea typeface="Courier Prime"/>
+                <a:cs typeface="Courier Prime"/>
+                <a:sym typeface="Courier Prime"/>
+              </a:rPr>
+              <a:t>Huilcamán</a:t>
+            </a:r>
+            <a:endParaRPr lang="en-US" sz="4200" dirty="0">
+              <a:solidFill>
+                <a:srgbClr val="FF914D"/>
+              </a:solidFill>
+              <a:latin typeface="Courier Prime"/>
+              <a:ea typeface="Courier Prime"/>
+              <a:cs typeface="Courier Prime"/>
+              <a:sym typeface="Courier Prime"/>
+            </a:endParaRPr>
+          </a:p>
+          <a:p>
+            <a:pPr algn="l">
+              <a:lnSpc>
+                <a:spcPts val="5880"/>
+              </a:lnSpc>
+            </a:pPr>
+            <a:r>
+              <a:rPr lang="en-US" sz="4200" dirty="0">
+                <a:solidFill>
+                  <a:srgbClr val="FF914D"/>
+                </a:solidFill>
+                <a:latin typeface="Courier Prime"/>
+                <a:ea typeface="Courier Prime"/>
+                <a:cs typeface="Courier Prime"/>
+                <a:sym typeface="Courier Prime"/>
+              </a:rPr>
+              <a:t>Benjamín Pedraza</a:t>
+            </a:r>
+          </a:p>
+        </p:txBody>
+      </p:sp>
+      <p:sp>
+        <p:nvSpPr>
+          <p:cNvPr id="9" name="TextBox 9"/>
+          <p:cNvSpPr txBox="1"/>
           <p:nvPr/>
         </p:nvSpPr>
         <p:spPr>
-          <a:xfrm rot="0">
+          <a:xfrm>
             <a:off x="2113038" y="1662031"/>
             <a:ext cx="11259224" cy="474154"/>
           </a:xfrm>
@@ -3359,7 +3330,7 @@
           </a:prstGeom>
         </p:spPr>
         <p:txBody>
-          <a:bodyPr anchor="t" rtlCol="false" tIns="0" lIns="0" bIns="0" rIns="0">
+          <a:bodyPr lIns="0" tIns="0" rIns="0" bIns="0" rtlCol="0" anchor="t">
             <a:spAutoFit/>
           </a:bodyPr>
           <a:lstStyle/>
@@ -3386,21 +3357,21 @@
       </p:sp>
       <p:sp>
         <p:nvSpPr>
-          <p:cNvPr name="TextBox 10" id="10"/>
-          <p:cNvSpPr txBox="true"/>
+          <p:cNvPr id="10" name="TextBox 10"/>
+          <p:cNvSpPr txBox="1"/>
           <p:nvPr/>
         </p:nvSpPr>
         <p:spPr>
-          <a:xfrm rot="0">
-            <a:off x="15101845" y="9537491"/>
-            <a:ext cx="2846784" cy="489204"/>
+          <a:xfrm>
+            <a:off x="14124702" y="8420100"/>
+            <a:ext cx="4800600" cy="785471"/>
           </a:xfrm>
           <a:prstGeom prst="rect">
             <a:avLst/>
           </a:prstGeom>
         </p:spPr>
         <p:txBody>
-          <a:bodyPr anchor="t" rtlCol="false" tIns="0" lIns="0" bIns="0" rIns="0">
+          <a:bodyPr wrap="square" lIns="0" tIns="0" rIns="0" bIns="0" rtlCol="0" anchor="t">
             <a:spAutoFit/>
           </a:bodyPr>
           <a:lstStyle/>
@@ -3411,29 +3382,43 @@
               </a:lnSpc>
             </a:pPr>
             <a:r>
-              <a:rPr lang="en-US" sz="1700">
-                <a:solidFill>
-                  <a:srgbClr val="FFFFFF"/>
-                </a:solidFill>
-                <a:latin typeface="Courier Prime"/>
-                <a:ea typeface="Courier Prime"/>
-                <a:cs typeface="Courier Prime"/>
-                <a:sym typeface="Courier Prime"/>
-              </a:rPr>
-              <a:t>Ing. Civil Informática</a:t>
-            </a:r>
-          </a:p>
-          <a:p>
-            <a:pPr algn="ctr">
-              <a:lnSpc>
-                <a:spcPts val="1938"/>
-              </a:lnSpc>
-              <a:spcBef>
-                <a:spcPct val="0"/>
-              </a:spcBef>
-            </a:pPr>
-            <a:r>
-              <a:rPr lang="en-US" sz="1700">
+              <a:rPr lang="en-US" sz="3000" dirty="0">
+                <a:solidFill>
+                  <a:srgbClr val="FFFFFF"/>
+                </a:solidFill>
+                <a:latin typeface="Courier Prime"/>
+                <a:ea typeface="Courier Prime"/>
+                <a:cs typeface="Courier Prime"/>
+                <a:sym typeface="Courier Prime"/>
+              </a:rPr>
+              <a:t>Ing. Civil </a:t>
+            </a:r>
+            <a:r>
+              <a:rPr lang="en-US" sz="3000" dirty="0" err="1">
+                <a:solidFill>
+                  <a:srgbClr val="FFFFFF"/>
+                </a:solidFill>
+                <a:latin typeface="Courier Prime"/>
+                <a:ea typeface="Courier Prime"/>
+                <a:cs typeface="Courier Prime"/>
+                <a:sym typeface="Courier Prime"/>
+              </a:rPr>
+              <a:t>Informática</a:t>
+            </a:r>
+            <a:r>
+              <a:rPr lang="en-US" sz="3000" dirty="0">
+                <a:solidFill>
+                  <a:srgbClr val="FFFFFF"/>
+                </a:solidFill>
+                <a:latin typeface="Courier Prime"/>
+                <a:ea typeface="Courier Prime"/>
+                <a:cs typeface="Courier Prime"/>
+                <a:sym typeface="Courier Prime"/>
+              </a:rPr>
+              <a:t> </a:t>
+            </a:r>
+            <a:r>
+              <a:rPr lang="en-US" sz="3000" dirty="0" err="1">
                 <a:solidFill>
                   <a:srgbClr val="FFFFFF"/>
                 </a:solidFill>
@@ -3444,6 +3429,15 @@
               </a:rPr>
               <a:t>Programació</a:t>
             </a:r>
+            <a:endParaRPr lang="en-US" sz="3000" dirty="0">
+              <a:solidFill>
+                <a:srgbClr val="FFFFFF"/>
+              </a:solidFill>
+              <a:latin typeface="Courier Prime"/>
+              <a:ea typeface="Courier Prime"/>
+              <a:cs typeface="Courier Prime"/>
+              <a:sym typeface="Courier Prime"/>
+            </a:endParaRPr>
           </a:p>
         </p:txBody>
       </p:sp>
@@ -3456,13 +3450,14 @@
 </file>
 
 <file path=ppt/slides/slide2.xml><?xml version="1.0" encoding="utf-8"?>
-<p:sld xmlns:p="http://schemas.openxmlformats.org/presentationml/2006/main" xmlns:a="http://schemas.openxmlformats.org/drawingml/2006/main" xmlns:r="http://schemas.openxmlformats.org/officeDocument/2006/relationships">
+<p:sld xmlns:a="http://schemas.openxmlformats.org/drawingml/2006/main" xmlns:r="http://schemas.openxmlformats.org/officeDocument/2006/relationships" xmlns:p="http://schemas.openxmlformats.org/presentationml/2006/main">
   <p:cSld>
     <p:bg>
       <p:bgPr>
         <a:solidFill>
           <a:srgbClr val="20232A"/>
         </a:solidFill>
+        <a:effectLst/>
       </p:bgPr>
     </p:bg>
     <p:spTree>
@@ -3481,12 +3476,12 @@
       </p:grpSpPr>
       <p:grpSp>
         <p:nvGrpSpPr>
-          <p:cNvPr name="Group 2" id="2"/>
+          <p:cNvPr id="2" name="Group 2"/>
           <p:cNvGrpSpPr/>
           <p:nvPr/>
         </p:nvGrpSpPr>
         <p:grpSpPr>
-          <a:xfrm rot="0">
+          <a:xfrm>
             <a:off x="-170578" y="-102870"/>
             <a:ext cx="9314578" cy="10389870"/>
             <a:chOff x="0" y="0"/>
@@ -3495,12 +3490,12 @@
         </p:grpSpPr>
         <p:sp>
           <p:nvSpPr>
-            <p:cNvPr name="Freeform 3" id="3"/>
+            <p:cNvPr id="3" name="Freeform 3"/>
             <p:cNvSpPr/>
             <p:nvPr/>
           </p:nvSpPr>
           <p:spPr>
-            <a:xfrm flipH="false" flipV="false" rot="0">
+            <a:xfrm>
               <a:off x="0" y="0"/>
               <a:ext cx="3397983" cy="3790253"/>
             </a:xfrm>
@@ -3509,9 +3504,9 @@
               <a:gdLst/>
               <a:ahLst/>
               <a:cxnLst/>
-              <a:rect r="r" b="b" t="t" l="l"/>
+              <a:rect l="l" t="t" r="r" b="b"/>
               <a:pathLst>
-                <a:path h="3790253" w="3397983">
+                <a:path w="3397983" h="3790253">
                   <a:moveTo>
                     <a:pt x="0" y="0"/>
                   </a:moveTo>
@@ -3536,21 +3531,21 @@
       </p:grpSp>
       <p:sp>
         <p:nvSpPr>
-          <p:cNvPr name="TextBox 4" id="4"/>
-          <p:cNvSpPr txBox="true"/>
+          <p:cNvPr id="4" name="TextBox 4"/>
+          <p:cNvSpPr txBox="1"/>
           <p:nvPr/>
         </p:nvSpPr>
         <p:spPr>
-          <a:xfrm rot="0">
+          <a:xfrm>
             <a:off x="1028700" y="1047750"/>
-            <a:ext cx="7031406" cy="582930"/>
+            <a:ext cx="7031406" cy="596253"/>
           </a:xfrm>
           <a:prstGeom prst="rect">
             <a:avLst/>
           </a:prstGeom>
         </p:spPr>
         <p:txBody>
-          <a:bodyPr anchor="t" rtlCol="false" tIns="0" lIns="0" bIns="0" rIns="0">
+          <a:bodyPr lIns="0" tIns="0" rIns="0" bIns="0" rtlCol="0" anchor="t">
             <a:spAutoFit/>
           </a:bodyPr>
           <a:lstStyle/>
@@ -3561,69 +3556,37 @@
               </a:lnSpc>
             </a:pPr>
             <a:r>
-              <a:rPr lang="en-US" sz="3999">
-                <a:solidFill>
-                  <a:srgbClr val="FFFFFF"/>
-                </a:solidFill>
-                <a:latin typeface="Courier Prime"/>
-                <a:ea typeface="Courier Prime"/>
-                <a:cs typeface="Courier Prime"/>
-                <a:sym typeface="Courier Prime"/>
-              </a:rPr>
-              <a:t>Introducción {</a:t>
-            </a:r>
-          </a:p>
-        </p:txBody>
-      </p:sp>
-      <p:sp>
-        <p:nvSpPr>
-          <p:cNvPr name="TextBox 5" id="5"/>
-          <p:cNvSpPr txBox="true"/>
+              <a:rPr lang="en-US" sz="3999" dirty="0" err="1">
+                <a:solidFill>
+                  <a:srgbClr val="FFFFFF"/>
+                </a:solidFill>
+                <a:latin typeface="Courier Prime"/>
+                <a:ea typeface="Courier Prime"/>
+                <a:cs typeface="Courier Prime"/>
+                <a:sym typeface="Courier Prime"/>
+              </a:rPr>
+              <a:t>Introducción</a:t>
+            </a:r>
+            <a:endParaRPr lang="en-US" sz="3999" dirty="0">
+              <a:solidFill>
+                <a:srgbClr val="FFFFFF"/>
+              </a:solidFill>
+              <a:latin typeface="Courier Prime"/>
+              <a:ea typeface="Courier Prime"/>
+              <a:cs typeface="Courier Prime"/>
+              <a:sym typeface="Courier Prime"/>
+            </a:endParaRPr>
+          </a:p>
+        </p:txBody>
+      </p:sp>
+      <p:sp>
+        <p:nvSpPr>
+          <p:cNvPr id="6" name="TextBox 6"/>
+          <p:cNvSpPr txBox="1"/>
           <p:nvPr/>
         </p:nvSpPr>
         <p:spPr>
-          <a:xfrm rot="0">
-            <a:off x="16557135" y="8675370"/>
-            <a:ext cx="702165" cy="582930"/>
-          </a:xfrm>
-          <a:prstGeom prst="rect">
-            <a:avLst/>
-          </a:prstGeom>
-        </p:spPr>
-        <p:txBody>
-          <a:bodyPr anchor="t" rtlCol="false" tIns="0" lIns="0" bIns="0" rIns="0">
-            <a:spAutoFit/>
-          </a:bodyPr>
-          <a:lstStyle/>
-          <a:p>
-            <a:pPr algn="r">
-              <a:lnSpc>
-                <a:spcPts val="4559"/>
-              </a:lnSpc>
-            </a:pPr>
-            <a:r>
-              <a:rPr lang="en-US" sz="3999">
-                <a:solidFill>
-                  <a:srgbClr val="FFFFFF"/>
-                </a:solidFill>
-                <a:latin typeface="Courier Prime"/>
-                <a:ea typeface="Courier Prime"/>
-                <a:cs typeface="Courier Prime"/>
-                <a:sym typeface="Courier Prime"/>
-              </a:rPr>
-              <a:t>}</a:t>
-            </a:r>
-          </a:p>
-        </p:txBody>
-      </p:sp>
-      <p:sp>
-        <p:nvSpPr>
-          <p:cNvPr name="TextBox 6" id="6"/>
-          <p:cNvSpPr txBox="true"/>
-          <p:nvPr/>
-        </p:nvSpPr>
-        <p:spPr>
-          <a:xfrm rot="0">
+          <a:xfrm>
             <a:off x="1180111" y="2923413"/>
             <a:ext cx="6988679" cy="3275457"/>
           </a:xfrm>
@@ -3632,7 +3595,7 @@
           </a:prstGeom>
         </p:spPr>
         <p:txBody>
-          <a:bodyPr anchor="t" rtlCol="false" tIns="0" lIns="0" bIns="0" rIns="0">
+          <a:bodyPr lIns="0" tIns="0" rIns="0" bIns="0" rtlCol="0" anchor="t">
             <a:spAutoFit/>
           </a:bodyPr>
           <a:lstStyle/>
@@ -3659,12 +3622,12 @@
       </p:sp>
       <p:sp>
         <p:nvSpPr>
-          <p:cNvPr name="TextBox 7" id="7"/>
-          <p:cNvSpPr txBox="true"/>
+          <p:cNvPr id="7" name="TextBox 7"/>
+          <p:cNvSpPr txBox="1"/>
           <p:nvPr/>
         </p:nvSpPr>
         <p:spPr>
-          <a:xfrm rot="0">
+          <a:xfrm>
             <a:off x="10776928" y="3134287"/>
             <a:ext cx="7400193" cy="3897630"/>
           </a:xfrm>
@@ -3673,12 +3636,12 @@
           </a:prstGeom>
         </p:spPr>
         <p:txBody>
-          <a:bodyPr anchor="t" rtlCol="false" tIns="0" lIns="0" bIns="0" rIns="0">
+          <a:bodyPr lIns="0" tIns="0" rIns="0" bIns="0" rtlCol="0" anchor="t">
             <a:spAutoFit/>
           </a:bodyPr>
           <a:lstStyle/>
           <a:p>
-            <a:pPr algn="l" marL="518160" indent="-259080" lvl="1">
+            <a:pPr marL="518160" lvl="1" indent="-259080" algn="l">
               <a:lnSpc>
                 <a:spcPts val="4440"/>
               </a:lnSpc>
@@ -3699,7 +3662,7 @@
             </a:r>
           </a:p>
           <a:p>
-            <a:pPr algn="l" marL="518160" indent="-259080" lvl="1">
+            <a:pPr marL="518160" lvl="1" indent="-259080" algn="l">
               <a:lnSpc>
                 <a:spcPts val="4440"/>
               </a:lnSpc>
@@ -3720,7 +3683,7 @@
             </a:r>
           </a:p>
           <a:p>
-            <a:pPr algn="l" marL="518160" indent="-259080" lvl="1">
+            <a:pPr marL="518160" lvl="1" indent="-259080" algn="l">
               <a:lnSpc>
                 <a:spcPts val="4440"/>
               </a:lnSpc>
@@ -3744,7 +3707,7 @@
       </p:sp>
       <p:sp>
         <p:nvSpPr>
-          <p:cNvPr name="AutoShape 8" id="8"/>
+          <p:cNvPr id="8" name="AutoShape 8"/>
           <p:cNvSpPr/>
           <p:nvPr/>
         </p:nvSpPr>
@@ -3756,24 +3719,24 @@
           <a:prstGeom prst="line">
             <a:avLst/>
           </a:prstGeom>
-          <a:ln cap="flat" w="95250">
+          <a:ln w="95250" cap="flat">
             <a:solidFill>
               <a:srgbClr val="2D2D35"/>
             </a:solidFill>
             <a:prstDash val="solid"/>
-            <a:headEnd type="none" len="sm" w="sm"/>
-            <a:tailEnd type="none" len="sm" w="sm"/>
+            <a:headEnd type="none" w="sm" len="sm"/>
+            <a:tailEnd type="none" w="sm" len="sm"/>
           </a:ln>
         </p:spPr>
       </p:sp>
       <p:sp>
         <p:nvSpPr>
-          <p:cNvPr name="TextBox 9" id="9"/>
-          <p:cNvSpPr txBox="true"/>
+          <p:cNvPr id="9" name="TextBox 9"/>
+          <p:cNvSpPr txBox="1"/>
           <p:nvPr/>
         </p:nvSpPr>
         <p:spPr>
-          <a:xfrm rot="0">
+          <a:xfrm>
             <a:off x="11145715" y="2388108"/>
             <a:ext cx="7031406" cy="582930"/>
           </a:xfrm>
@@ -3782,7 +3745,7 @@
           </a:prstGeom>
         </p:spPr>
         <p:txBody>
-          <a:bodyPr anchor="t" rtlCol="false" tIns="0" lIns="0" bIns="0" rIns="0">
+          <a:bodyPr lIns="0" tIns="0" rIns="0" bIns="0" rtlCol="0" anchor="t">
             <a:spAutoFit/>
           </a:bodyPr>
           <a:lstStyle/>
@@ -3809,12 +3772,12 @@
       </p:sp>
       <p:sp>
         <p:nvSpPr>
-          <p:cNvPr name="Freeform 10" id="10"/>
+          <p:cNvPr id="10" name="Freeform 10"/>
           <p:cNvSpPr/>
           <p:nvPr/>
         </p:nvSpPr>
         <p:spPr>
-          <a:xfrm flipH="false" flipV="false" rot="0">
+          <a:xfrm>
             <a:off x="17468106" y="195629"/>
             <a:ext cx="542051" cy="544066"/>
           </a:xfrm>
@@ -3823,9 +3786,9 @@
             <a:gdLst/>
             <a:ahLst/>
             <a:cxnLst/>
-            <a:rect r="r" b="b" t="t" l="l"/>
+            <a:rect l="l" t="t" r="r" b="b"/>
             <a:pathLst>
-              <a:path h="544066" w="542051">
+              <a:path w="542051" h="544066">
                 <a:moveTo>
                   <a:pt x="0" y="0"/>
                 </a:moveTo>
@@ -3848,7 +3811,7 @@
           <a:blipFill>
             <a:blip r:embed="rId2"/>
             <a:stretch>
-              <a:fillRect l="0" t="0" r="0" b="0"/>
+              <a:fillRect/>
             </a:stretch>
           </a:blipFill>
         </p:spPr>
@@ -3862,13 +3825,14 @@
 </file>
 
 <file path=ppt/slides/slide3.xml><?xml version="1.0" encoding="utf-8"?>
-<p:sld xmlns:p="http://schemas.openxmlformats.org/presentationml/2006/main" xmlns:a="http://schemas.openxmlformats.org/drawingml/2006/main">
+<p:sld xmlns:a="http://schemas.openxmlformats.org/drawingml/2006/main" xmlns:r="http://schemas.openxmlformats.org/officeDocument/2006/relationships" xmlns:p="http://schemas.openxmlformats.org/presentationml/2006/main">
   <p:cSld>
     <p:bg>
       <p:bgPr>
         <a:solidFill>
           <a:srgbClr val="20232A"/>
         </a:solidFill>
+        <a:effectLst/>
       </p:bgPr>
     </p:bg>
     <p:spTree>
@@ -3887,21 +3851,21 @@
       </p:grpSpPr>
       <p:sp>
         <p:nvSpPr>
-          <p:cNvPr name="TextBox 2" id="2"/>
-          <p:cNvSpPr txBox="true"/>
+          <p:cNvPr id="2" name="TextBox 2"/>
+          <p:cNvSpPr txBox="1"/>
           <p:nvPr/>
         </p:nvSpPr>
         <p:spPr>
-          <a:xfrm rot="0">
+          <a:xfrm>
             <a:off x="1244856" y="1047750"/>
-            <a:ext cx="7031406" cy="582930"/>
+            <a:ext cx="7031406" cy="596253"/>
           </a:xfrm>
           <a:prstGeom prst="rect">
             <a:avLst/>
           </a:prstGeom>
         </p:spPr>
         <p:txBody>
-          <a:bodyPr anchor="t" rtlCol="false" tIns="0" lIns="0" bIns="0" rIns="0">
+          <a:bodyPr lIns="0" tIns="0" rIns="0" bIns="0" rtlCol="0" anchor="t">
             <a:spAutoFit/>
           </a:bodyPr>
           <a:lstStyle/>
@@ -3912,28 +3876,61 @@
               </a:lnSpc>
             </a:pPr>
             <a:r>
-              <a:rPr lang="en-US" sz="3999">
-                <a:solidFill>
-                  <a:srgbClr val="FFFFFF"/>
-                </a:solidFill>
-                <a:latin typeface="Courier Prime"/>
-                <a:ea typeface="Courier Prime"/>
-                <a:cs typeface="Courier Prime"/>
-                <a:sym typeface="Courier Prime"/>
-              </a:rPr>
-              <a:t>Estrategia utilizada {</a:t>
-            </a:r>
-          </a:p>
-        </p:txBody>
-      </p:sp>
-      <p:sp>
-        <p:nvSpPr>
-          <p:cNvPr name="TextBox 3" id="3"/>
-          <p:cNvSpPr txBox="true"/>
+              <a:rPr lang="en-US" sz="3999" dirty="0" err="1">
+                <a:solidFill>
+                  <a:srgbClr val="FFFFFF"/>
+                </a:solidFill>
+                <a:latin typeface="Courier Prime"/>
+                <a:ea typeface="Courier Prime"/>
+                <a:cs typeface="Courier Prime"/>
+                <a:sym typeface="Courier Prime"/>
+              </a:rPr>
+              <a:t>Estrategia</a:t>
+            </a:r>
+            <a:r>
+              <a:rPr lang="en-US" sz="3999" dirty="0">
+                <a:solidFill>
+                  <a:srgbClr val="FFFFFF"/>
+                </a:solidFill>
+                <a:latin typeface="Courier Prime"/>
+                <a:ea typeface="Courier Prime"/>
+                <a:cs typeface="Courier Prime"/>
+                <a:sym typeface="Courier Prime"/>
+              </a:rPr>
+              <a:t> </a:t>
+            </a:r>
+            <a:r>
+              <a:rPr lang="en-US" sz="3999" dirty="0" err="1">
+                <a:solidFill>
+                  <a:srgbClr val="FFFFFF"/>
+                </a:solidFill>
+                <a:latin typeface="Courier Prime"/>
+                <a:ea typeface="Courier Prime"/>
+                <a:cs typeface="Courier Prime"/>
+                <a:sym typeface="Courier Prime"/>
+              </a:rPr>
+              <a:t>utilizada</a:t>
+            </a:r>
+            <a:endParaRPr lang="en-US" sz="3999" dirty="0">
+              <a:solidFill>
+                <a:srgbClr val="FFFFFF"/>
+              </a:solidFill>
+              <a:latin typeface="Courier Prime"/>
+              <a:ea typeface="Courier Prime"/>
+              <a:cs typeface="Courier Prime"/>
+              <a:sym typeface="Courier Prime"/>
+            </a:endParaRPr>
+          </a:p>
+        </p:txBody>
+      </p:sp>
+      <p:sp>
+        <p:nvSpPr>
+          <p:cNvPr id="3" name="TextBox 3"/>
+          <p:cNvSpPr txBox="1"/>
           <p:nvPr/>
         </p:nvSpPr>
         <p:spPr>
-          <a:xfrm rot="0">
+          <a:xfrm>
             <a:off x="1028700" y="2006060"/>
             <a:ext cx="8079851" cy="635806"/>
           </a:xfrm>
@@ -3942,7 +3939,7 @@
           </a:prstGeom>
         </p:spPr>
         <p:txBody>
-          <a:bodyPr anchor="t" rtlCol="false" tIns="0" lIns="0" bIns="0" rIns="0">
+          <a:bodyPr lIns="0" tIns="0" rIns="0" bIns="0" rtlCol="0" anchor="t">
             <a:spAutoFit/>
           </a:bodyPr>
           <a:lstStyle/>
@@ -3972,12 +3969,12 @@
       </p:sp>
       <p:sp>
         <p:nvSpPr>
-          <p:cNvPr name="TextBox 4" id="4"/>
-          <p:cNvSpPr txBox="true"/>
+          <p:cNvPr id="4" name="TextBox 4"/>
+          <p:cNvSpPr txBox="1"/>
           <p:nvPr/>
         </p:nvSpPr>
         <p:spPr>
-          <a:xfrm rot="0">
+          <a:xfrm>
             <a:off x="1028700" y="2807141"/>
             <a:ext cx="6995632" cy="1778127"/>
           </a:xfrm>
@@ -3986,16 +3983,16 @@
           </a:prstGeom>
         </p:spPr>
         <p:txBody>
-          <a:bodyPr anchor="t" rtlCol="false" tIns="0" lIns="0" bIns="0" rIns="0">
+          <a:bodyPr lIns="0" tIns="0" rIns="0" bIns="0" rtlCol="0" anchor="t">
             <a:spAutoFit/>
           </a:bodyPr>
           <a:lstStyle/>
           <a:p>
-            <a:pPr algn="just" marL="453400" indent="-226700" lvl="1">
+            <a:pPr marL="453400" lvl="1" indent="-226700" algn="just">
               <a:lnSpc>
                 <a:spcPts val="2394"/>
               </a:lnSpc>
-              <a:buAutoNum type="arabicPeriod" startAt="1"/>
+              <a:buAutoNum type="arabicPeriod"/>
             </a:pPr>
             <a:r>
               <a:rPr lang="en-US" sz="2100">
@@ -4036,12 +4033,12 @@
       </p:sp>
       <p:sp>
         <p:nvSpPr>
-          <p:cNvPr name="TextBox 5" id="5"/>
-          <p:cNvSpPr txBox="true"/>
+          <p:cNvPr id="5" name="TextBox 5"/>
+          <p:cNvSpPr txBox="1"/>
           <p:nvPr/>
         </p:nvSpPr>
         <p:spPr>
-          <a:xfrm rot="0">
+          <a:xfrm>
             <a:off x="1028700" y="4747193"/>
             <a:ext cx="7081242" cy="2073402"/>
           </a:xfrm>
@@ -4050,16 +4047,16 @@
           </a:prstGeom>
         </p:spPr>
         <p:txBody>
-          <a:bodyPr anchor="t" rtlCol="false" tIns="0" lIns="0" bIns="0" rIns="0">
+          <a:bodyPr lIns="0" tIns="0" rIns="0" bIns="0" rtlCol="0" anchor="t">
             <a:spAutoFit/>
           </a:bodyPr>
           <a:lstStyle/>
           <a:p>
-            <a:pPr algn="l" marL="453390" indent="-226695" lvl="1">
+            <a:pPr marL="453390" lvl="1" indent="-226695" algn="l">
               <a:lnSpc>
                 <a:spcPts val="2394"/>
               </a:lnSpc>
-              <a:buAutoNum type="arabicPeriod" startAt="1"/>
+              <a:buAutoNum type="arabicPeriod"/>
             </a:pPr>
             <a:r>
               <a:rPr lang="en-US" sz="2100">
@@ -4100,12 +4097,12 @@
       </p:sp>
       <p:sp>
         <p:nvSpPr>
-          <p:cNvPr name="TextBox 6" id="6"/>
-          <p:cNvSpPr txBox="true"/>
+          <p:cNvPr id="6" name="TextBox 6"/>
+          <p:cNvSpPr txBox="1"/>
           <p:nvPr/>
         </p:nvSpPr>
         <p:spPr>
-          <a:xfrm rot="0">
+          <a:xfrm>
             <a:off x="1028700" y="6982520"/>
             <a:ext cx="6995632" cy="1482852"/>
           </a:xfrm>
@@ -4114,16 +4111,16 @@
           </a:prstGeom>
         </p:spPr>
         <p:txBody>
-          <a:bodyPr anchor="t" rtlCol="false" tIns="0" lIns="0" bIns="0" rIns="0">
+          <a:bodyPr lIns="0" tIns="0" rIns="0" bIns="0" rtlCol="0" anchor="t">
             <a:spAutoFit/>
           </a:bodyPr>
           <a:lstStyle/>
           <a:p>
-            <a:pPr algn="l" marL="453400" indent="-226700" lvl="1">
+            <a:pPr marL="453400" lvl="1" indent="-226700" algn="l">
               <a:lnSpc>
                 <a:spcPts val="2394"/>
               </a:lnSpc>
-              <a:buAutoNum type="arabicPeriod" startAt="1"/>
+              <a:buAutoNum type="arabicPeriod"/>
             </a:pPr>
             <a:r>
               <a:rPr lang="en-US" sz="2100">
@@ -4158,47 +4155,6 @@
                 <a:sym typeface="Courier Prime"/>
               </a:rPr>
               <a:t>Mediante Matplotlib y sus funciones asociadas podemos interactuar con la edición de imágenes mediante botones interactivos y funcionales.</a:t>
-            </a:r>
-          </a:p>
-        </p:txBody>
-      </p:sp>
-      <p:sp>
-        <p:nvSpPr>
-          <p:cNvPr name="TextBox 7" id="7"/>
-          <p:cNvSpPr txBox="true"/>
-          <p:nvPr/>
-        </p:nvSpPr>
-        <p:spPr>
-          <a:xfrm rot="0">
-            <a:off x="16557135" y="8675370"/>
-            <a:ext cx="702165" cy="582930"/>
-          </a:xfrm>
-          <a:prstGeom prst="rect">
-            <a:avLst/>
-          </a:prstGeom>
-        </p:spPr>
-        <p:txBody>
-          <a:bodyPr anchor="t" rtlCol="false" tIns="0" lIns="0" bIns="0" rIns="0">
-            <a:spAutoFit/>
-          </a:bodyPr>
-          <a:lstStyle/>
-          <a:p>
-            <a:pPr algn="r">
-              <a:lnSpc>
-                <a:spcPts val="4559"/>
-              </a:lnSpc>
-            </a:pPr>
-            <a:r>
-              <a:rPr lang="en-US" sz="3999">
-                <a:solidFill>
-                  <a:srgbClr val="FFFFFF"/>
-                </a:solidFill>
-                <a:latin typeface="Courier Prime"/>
-                <a:ea typeface="Courier Prime"/>
-                <a:cs typeface="Courier Prime"/>
-                <a:sym typeface="Courier Prime"/>
-              </a:rPr>
-              <a:t>}</a:t>
             </a:r>
           </a:p>
         </p:txBody>
@@ -4212,13 +4168,14 @@
 </file>
 
 <file path=ppt/slides/slide4.xml><?xml version="1.0" encoding="utf-8"?>
-<p:sld xmlns:p="http://schemas.openxmlformats.org/presentationml/2006/main" xmlns:a="http://schemas.openxmlformats.org/drawingml/2006/main" xmlns:r="http://schemas.openxmlformats.org/officeDocument/2006/relationships">
+<p:sld xmlns:a="http://schemas.openxmlformats.org/drawingml/2006/main" xmlns:r="http://schemas.openxmlformats.org/officeDocument/2006/relationships" xmlns:p="http://schemas.openxmlformats.org/presentationml/2006/main">
   <p:cSld>
     <p:bg>
       <p:bgPr>
         <a:solidFill>
           <a:srgbClr val="20232A"/>
         </a:solidFill>
+        <a:effectLst/>
       </p:bgPr>
     </p:bg>
     <p:spTree>
@@ -4237,26 +4194,38 @@
       </p:grpSpPr>
       <p:grpSp>
         <p:nvGrpSpPr>
-          <p:cNvPr name="Group 2" id="2"/>
+          <p:cNvPr id="25" name="Group 6">
+            <a:extLst>
+              <a:ext uri="{FF2B5EF4-FFF2-40B4-BE49-F238E27FC236}">
+                <a16:creationId xmlns:a16="http://schemas.microsoft.com/office/drawing/2014/main" id="{AA37BDCE-6698-B8DB-6806-BBA695891815}"/>
+              </a:ext>
+            </a:extLst>
+          </p:cNvPr>
           <p:cNvGrpSpPr/>
           <p:nvPr/>
         </p:nvGrpSpPr>
         <p:grpSpPr>
-          <a:xfrm rot="0">
-            <a:off x="1028700" y="2874385"/>
-            <a:ext cx="8314629" cy="2239551"/>
+          <a:xfrm>
+            <a:off x="1695653" y="2715796"/>
+            <a:ext cx="7076986" cy="3154593"/>
             <a:chOff x="0" y="0"/>
             <a:chExt cx="3518720" cy="947770"/>
           </a:xfrm>
         </p:grpSpPr>
         <p:sp>
           <p:nvSpPr>
-            <p:cNvPr name="Freeform 3" id="3"/>
+            <p:cNvPr id="26" name="Freeform 7">
+              <a:extLst>
+                <a:ext uri="{FF2B5EF4-FFF2-40B4-BE49-F238E27FC236}">
+                  <a16:creationId xmlns:a16="http://schemas.microsoft.com/office/drawing/2014/main" id="{CD55B02E-D290-F55E-6AF1-BE7F2C013EF5}"/>
+                </a:ext>
+              </a:extLst>
+            </p:cNvPr>
             <p:cNvSpPr/>
             <p:nvPr/>
           </p:nvSpPr>
           <p:spPr>
-            <a:xfrm flipH="false" flipV="false" rot="0">
+            <a:xfrm>
               <a:off x="0" y="0"/>
               <a:ext cx="3518720" cy="947770"/>
             </a:xfrm>
@@ -4265,9 +4234,9 @@
               <a:gdLst/>
               <a:ahLst/>
               <a:cxnLst/>
-              <a:rect r="r" b="b" t="t" l="l"/>
+              <a:rect l="l" t="t" r="r" b="b"/>
               <a:pathLst>
-                <a:path h="947770" w="3518720">
+                <a:path w="3518720" h="947770">
                   <a:moveTo>
                     <a:pt x="0" y="0"/>
                   </a:moveTo>
@@ -4292,45 +4261,51 @@
       </p:grpSp>
       <p:sp>
         <p:nvSpPr>
-          <p:cNvPr name="AutoShape 4" id="4"/>
+          <p:cNvPr id="27" name="AutoShape 8">
+            <a:extLst>
+              <a:ext uri="{FF2B5EF4-FFF2-40B4-BE49-F238E27FC236}">
+                <a16:creationId xmlns:a16="http://schemas.microsoft.com/office/drawing/2014/main" id="{2990DD9A-C500-D2B4-B4E9-33F78D9AF66C}"/>
+              </a:ext>
+            </a:extLst>
+          </p:cNvPr>
           <p:cNvSpPr/>
           <p:nvPr/>
         </p:nvSpPr>
         <p:spPr>
           <a:xfrm>
-            <a:off x="1066800" y="2874385"/>
-            <a:ext cx="175" cy="2239551"/>
+            <a:off x="1693018" y="2715795"/>
+            <a:ext cx="16287" cy="3154594"/>
           </a:xfrm>
           <a:prstGeom prst="line">
             <a:avLst/>
           </a:prstGeom>
-          <a:ln cap="flat" w="76200">
+          <a:ln w="76200" cap="flat">
             <a:solidFill>
               <a:srgbClr val="737373"/>
             </a:solidFill>
             <a:prstDash val="solid"/>
-            <a:headEnd type="none" len="sm" w="sm"/>
-            <a:tailEnd type="none" len="sm" w="sm"/>
+            <a:headEnd type="none" w="sm" len="sm"/>
+            <a:tailEnd type="none" w="sm" len="sm"/>
           </a:ln>
         </p:spPr>
       </p:sp>
       <p:sp>
         <p:nvSpPr>
-          <p:cNvPr name="TextBox 5" id="5"/>
-          <p:cNvSpPr txBox="true"/>
+          <p:cNvPr id="5" name="TextBox 5"/>
+          <p:cNvSpPr txBox="1"/>
           <p:nvPr/>
         </p:nvSpPr>
         <p:spPr>
-          <a:xfrm rot="0">
+          <a:xfrm>
             <a:off x="1219200" y="1138930"/>
-            <a:ext cx="7031406" cy="1154430"/>
+            <a:ext cx="7031406" cy="1186159"/>
           </a:xfrm>
           <a:prstGeom prst="rect">
             <a:avLst/>
           </a:prstGeom>
         </p:spPr>
         <p:txBody>
-          <a:bodyPr anchor="t" rtlCol="false" tIns="0" lIns="0" bIns="0" rIns="0">
+          <a:bodyPr lIns="0" tIns="0" rIns="0" bIns="0" rtlCol="0" anchor="t">
             <a:spAutoFit/>
           </a:bodyPr>
           <a:lstStyle/>
@@ -4341,42 +4316,99 @@
               </a:lnSpc>
             </a:pPr>
             <a:r>
-              <a:rPr lang="en-US" sz="3999">
-                <a:solidFill>
-                  <a:srgbClr val="FFFFFF"/>
-                </a:solidFill>
-                <a:latin typeface="Courier Prime"/>
-                <a:ea typeface="Courier Prime"/>
-                <a:cs typeface="Courier Prime"/>
-                <a:sym typeface="Courier Prime"/>
-              </a:rPr>
-              <a:t>Funciones Principales utilizadas{</a:t>
-            </a:r>
+              <a:rPr lang="en-US" sz="3999" dirty="0" err="1">
+                <a:solidFill>
+                  <a:srgbClr val="FFFFFF"/>
+                </a:solidFill>
+                <a:latin typeface="Courier Prime"/>
+                <a:ea typeface="Courier Prime"/>
+                <a:cs typeface="Courier Prime"/>
+                <a:sym typeface="Courier Prime"/>
+              </a:rPr>
+              <a:t>Funciones</a:t>
+            </a:r>
+            <a:r>
+              <a:rPr lang="en-US" sz="3999" dirty="0">
+                <a:solidFill>
+                  <a:srgbClr val="FFFFFF"/>
+                </a:solidFill>
+                <a:latin typeface="Courier Prime"/>
+                <a:ea typeface="Courier Prime"/>
+                <a:cs typeface="Courier Prime"/>
+                <a:sym typeface="Courier Prime"/>
+              </a:rPr>
+              <a:t> </a:t>
+            </a:r>
+            <a:r>
+              <a:rPr lang="en-US" sz="3999" dirty="0" err="1">
+                <a:solidFill>
+                  <a:srgbClr val="FFFFFF"/>
+                </a:solidFill>
+                <a:latin typeface="Courier Prime"/>
+                <a:ea typeface="Courier Prime"/>
+                <a:cs typeface="Courier Prime"/>
+                <a:sym typeface="Courier Prime"/>
+              </a:rPr>
+              <a:t>Principales</a:t>
+            </a:r>
+            <a:r>
+              <a:rPr lang="en-US" sz="3999" dirty="0">
+                <a:solidFill>
+                  <a:srgbClr val="FFFFFF"/>
+                </a:solidFill>
+                <a:latin typeface="Courier Prime"/>
+                <a:ea typeface="Courier Prime"/>
+                <a:cs typeface="Courier Prime"/>
+                <a:sym typeface="Courier Prime"/>
+              </a:rPr>
+              <a:t> </a:t>
+            </a:r>
+            <a:r>
+              <a:rPr lang="en-US" sz="3999" dirty="0" err="1">
+                <a:solidFill>
+                  <a:srgbClr val="FFFFFF"/>
+                </a:solidFill>
+                <a:latin typeface="Courier Prime"/>
+                <a:ea typeface="Courier Prime"/>
+                <a:cs typeface="Courier Prime"/>
+                <a:sym typeface="Courier Prime"/>
+              </a:rPr>
+              <a:t>utilizadas</a:t>
+            </a:r>
+            <a:endParaRPr lang="en-US" sz="3999" dirty="0">
+              <a:solidFill>
+                <a:srgbClr val="FFFFFF"/>
+              </a:solidFill>
+              <a:latin typeface="Courier Prime"/>
+              <a:ea typeface="Courier Prime"/>
+              <a:cs typeface="Courier Prime"/>
+              <a:sym typeface="Courier Prime"/>
+            </a:endParaRPr>
           </a:p>
         </p:txBody>
       </p:sp>
       <p:grpSp>
         <p:nvGrpSpPr>
-          <p:cNvPr name="Group 6" id="6"/>
+          <p:cNvPr id="6" name="Group 6"/>
           <p:cNvGrpSpPr/>
           <p:nvPr/>
         </p:nvGrpSpPr>
         <p:grpSpPr>
-          <a:xfrm rot="0">
-            <a:off x="1066800" y="5217974"/>
-            <a:ext cx="8276529" cy="2229289"/>
+          <a:xfrm>
+            <a:off x="1788860" y="6680028"/>
+            <a:ext cx="7076986" cy="3154593"/>
             <a:chOff x="0" y="0"/>
             <a:chExt cx="3518720" cy="947770"/>
           </a:xfrm>
         </p:grpSpPr>
         <p:sp>
           <p:nvSpPr>
-            <p:cNvPr name="Freeform 7" id="7"/>
+            <p:cNvPr id="7" name="Freeform 7"/>
             <p:cNvSpPr/>
             <p:nvPr/>
           </p:nvSpPr>
           <p:spPr>
-            <a:xfrm flipH="false" flipV="false" rot="0">
+            <a:xfrm>
               <a:off x="0" y="0"/>
               <a:ext cx="3518720" cy="947770"/>
             </a:xfrm>
@@ -4385,9 +4417,9 @@
               <a:gdLst/>
               <a:ahLst/>
               <a:cxnLst/>
-              <a:rect r="r" b="b" t="t" l="l"/>
+              <a:rect l="l" t="t" r="r" b="b"/>
               <a:pathLst>
-                <a:path h="947770" w="3518720">
+                <a:path w="3518720" h="947770">
                   <a:moveTo>
                     <a:pt x="0" y="0"/>
                   </a:moveTo>
@@ -4412,50 +4444,50 @@
       </p:grpSp>
       <p:sp>
         <p:nvSpPr>
-          <p:cNvPr name="AutoShape 8" id="8"/>
+          <p:cNvPr id="8" name="AutoShape 8"/>
           <p:cNvSpPr/>
           <p:nvPr/>
         </p:nvSpPr>
         <p:spPr>
           <a:xfrm>
-            <a:off x="1066800" y="5217974"/>
-            <a:ext cx="0" cy="2202556"/>
+            <a:off x="1786225" y="6680027"/>
+            <a:ext cx="16287" cy="3154594"/>
           </a:xfrm>
           <a:prstGeom prst="line">
             <a:avLst/>
           </a:prstGeom>
-          <a:ln cap="flat" w="76200">
+          <a:ln w="76200" cap="flat">
             <a:solidFill>
               <a:srgbClr val="737373"/>
             </a:solidFill>
             <a:prstDash val="solid"/>
-            <a:headEnd type="none" len="sm" w="sm"/>
-            <a:tailEnd type="none" len="sm" w="sm"/>
+            <a:headEnd type="none" w="sm" len="sm"/>
+            <a:tailEnd type="none" w="sm" len="sm"/>
           </a:ln>
         </p:spPr>
       </p:sp>
       <p:grpSp>
         <p:nvGrpSpPr>
-          <p:cNvPr name="Group 9" id="9"/>
+          <p:cNvPr id="9" name="Group 9"/>
           <p:cNvGrpSpPr/>
           <p:nvPr/>
         </p:nvGrpSpPr>
         <p:grpSpPr>
-          <a:xfrm rot="0">
-            <a:off x="1066800" y="7561563"/>
-            <a:ext cx="8276529" cy="2229289"/>
+          <a:xfrm>
+            <a:off x="10670131" y="6680027"/>
+            <a:ext cx="6405196" cy="3154594"/>
             <a:chOff x="0" y="0"/>
             <a:chExt cx="3518720" cy="947770"/>
           </a:xfrm>
         </p:grpSpPr>
         <p:sp>
           <p:nvSpPr>
-            <p:cNvPr name="Freeform 10" id="10"/>
+            <p:cNvPr id="10" name="Freeform 10"/>
             <p:cNvSpPr/>
             <p:nvPr/>
           </p:nvSpPr>
           <p:spPr>
-            <a:xfrm flipH="false" flipV="false" rot="0">
+            <a:xfrm>
               <a:off x="0" y="0"/>
               <a:ext cx="3518720" cy="947770"/>
             </a:xfrm>
@@ -4464,9 +4496,9 @@
               <a:gdLst/>
               <a:ahLst/>
               <a:cxnLst/>
-              <a:rect r="r" b="b" t="t" l="l"/>
+              <a:rect l="l" t="t" r="r" b="b"/>
               <a:pathLst>
-                <a:path h="947770" w="3518720">
+                <a:path w="3518720" h="947770">
                   <a:moveTo>
                     <a:pt x="0" y="0"/>
                   </a:moveTo>
@@ -4489,52 +4521,28 @@
           </p:spPr>
         </p:sp>
       </p:grpSp>
-      <p:sp>
-        <p:nvSpPr>
-          <p:cNvPr name="AutoShape 11" id="11"/>
-          <p:cNvSpPr/>
-          <p:nvPr/>
-        </p:nvSpPr>
-        <p:spPr>
-          <a:xfrm>
-            <a:off x="1066800" y="7588297"/>
-            <a:ext cx="0" cy="2202556"/>
-          </a:xfrm>
-          <a:prstGeom prst="line">
-            <a:avLst/>
-          </a:prstGeom>
-          <a:ln cap="flat" w="76200">
-            <a:solidFill>
-              <a:srgbClr val="737373"/>
-            </a:solidFill>
-            <a:prstDash val="solid"/>
-            <a:headEnd type="none" len="sm" w="sm"/>
-            <a:tailEnd type="none" len="sm" w="sm"/>
-          </a:ln>
-        </p:spPr>
-      </p:sp>
       <p:grpSp>
         <p:nvGrpSpPr>
-          <p:cNvPr name="Group 12" id="12"/>
+          <p:cNvPr id="12" name="Group 12"/>
           <p:cNvGrpSpPr/>
           <p:nvPr/>
         </p:nvGrpSpPr>
         <p:grpSpPr>
           <a:xfrm rot="5400000">
-            <a:off x="12074838" y="3082494"/>
-            <a:ext cx="4343240" cy="6405196"/>
+            <a:off x="12201676" y="1184250"/>
+            <a:ext cx="3342105" cy="6405196"/>
             <a:chOff x="0" y="0"/>
             <a:chExt cx="2643839" cy="3899003"/>
           </a:xfrm>
         </p:grpSpPr>
         <p:sp>
           <p:nvSpPr>
-            <p:cNvPr name="Freeform 13" id="13"/>
+            <p:cNvPr id="13" name="Freeform 13"/>
             <p:cNvSpPr/>
             <p:nvPr/>
           </p:nvSpPr>
           <p:spPr>
-            <a:xfrm flipH="false" flipV="false" rot="0">
+            <a:xfrm>
               <a:off x="0" y="0"/>
               <a:ext cx="2643839" cy="3899003"/>
             </a:xfrm>
@@ -4543,9 +4551,9 @@
               <a:gdLst/>
               <a:ahLst/>
               <a:cxnLst/>
-              <a:rect r="r" b="b" t="t" l="l"/>
+              <a:rect l="l" t="t" r="r" b="b"/>
               <a:pathLst>
-                <a:path h="3899003" w="2643839">
+                <a:path w="2643839" h="3899003">
                   <a:moveTo>
                     <a:pt x="0" y="0"/>
                   </a:moveTo>
@@ -4570,12 +4578,12 @@
       </p:grpSp>
       <p:sp>
         <p:nvSpPr>
-          <p:cNvPr name="Freeform 14" id="14"/>
+          <p:cNvPr id="14" name="Freeform 14"/>
           <p:cNvSpPr/>
           <p:nvPr/>
         </p:nvSpPr>
         <p:spPr>
-          <a:xfrm flipH="false" flipV="false" rot="0">
+          <a:xfrm>
             <a:off x="17449056" y="205154"/>
             <a:ext cx="542051" cy="544066"/>
           </a:xfrm>
@@ -4584,9 +4592,9 @@
             <a:gdLst/>
             <a:ahLst/>
             <a:cxnLst/>
-            <a:rect r="r" b="b" t="t" l="l"/>
+            <a:rect l="l" t="t" r="r" b="b"/>
             <a:pathLst>
-              <a:path h="544066" w="542051">
+              <a:path w="542051" h="544066">
                 <a:moveTo>
                   <a:pt x="0" y="0"/>
                 </a:moveTo>
@@ -4609,19 +4617,19 @@
           <a:blipFill>
             <a:blip r:embed="rId2"/>
             <a:stretch>
-              <a:fillRect l="0" t="0" r="0" b="0"/>
+              <a:fillRect/>
             </a:stretch>
           </a:blipFill>
         </p:spPr>
       </p:sp>
       <p:sp>
         <p:nvSpPr>
-          <p:cNvPr name="TextBox 15" id="15"/>
-          <p:cNvSpPr txBox="true"/>
+          <p:cNvPr id="15" name="TextBox 15"/>
+          <p:cNvSpPr txBox="1"/>
           <p:nvPr/>
         </p:nvSpPr>
         <p:spPr>
-          <a:xfrm rot="0">
+          <a:xfrm>
             <a:off x="2254547" y="3038915"/>
             <a:ext cx="5901035" cy="461772"/>
           </a:xfrm>
@@ -4630,7 +4638,7 @@
           </a:prstGeom>
         </p:spPr>
         <p:txBody>
-          <a:bodyPr anchor="t" rtlCol="false" tIns="0" lIns="0" bIns="0" rIns="0">
+          <a:bodyPr lIns="0" tIns="0" rIns="0" bIns="0" rtlCol="0" anchor="t">
             <a:spAutoFit/>
           </a:bodyPr>
           <a:lstStyle/>
@@ -4660,21 +4668,21 @@
       </p:sp>
       <p:sp>
         <p:nvSpPr>
-          <p:cNvPr name="TextBox 16" id="16"/>
-          <p:cNvSpPr txBox="true"/>
+          <p:cNvPr id="16" name="TextBox 16"/>
+          <p:cNvSpPr txBox="1"/>
           <p:nvPr/>
         </p:nvSpPr>
         <p:spPr>
-          <a:xfrm rot="0">
-            <a:off x="1664443" y="3524446"/>
-            <a:ext cx="7081242" cy="1187577"/>
+          <a:xfrm>
+            <a:off x="2302896" y="3750238"/>
+            <a:ext cx="5806826" cy="1542730"/>
           </a:xfrm>
           <a:prstGeom prst="rect">
             <a:avLst/>
           </a:prstGeom>
         </p:spPr>
         <p:txBody>
-          <a:bodyPr anchor="t" rtlCol="false" tIns="0" lIns="0" bIns="0" rIns="0">
+          <a:bodyPr wrap="square" lIns="0" tIns="0" rIns="0" bIns="0" rtlCol="0" anchor="t">
             <a:spAutoFit/>
           </a:bodyPr>
           <a:lstStyle/>
@@ -4688,29 +4696,437 @@
               </a:spcBef>
             </a:pPr>
             <a:r>
-              <a:rPr lang="en-US" sz="2100">
-                <a:solidFill>
-                  <a:srgbClr val="FFFFFF"/>
-                </a:solidFill>
-                <a:latin typeface="Courier Prime"/>
-                <a:ea typeface="Courier Prime"/>
-                <a:cs typeface="Courier Prime"/>
-                <a:sym typeface="Courier Prime"/>
-              </a:rPr>
-              <a:t>Ambas funciones están diseñadas para buscar en el directorio de cada PC carpetas con el mínimo de imágenes requeridas para continuar con la correcta ejecución del programa.</a:t>
-            </a:r>
-          </a:p>
-        </p:txBody>
-      </p:sp>
-      <p:sp>
-        <p:nvSpPr>
-          <p:cNvPr name="TextBox 17" id="17"/>
-          <p:cNvSpPr txBox="true"/>
+              <a:rPr lang="en-US" sz="2100" dirty="0">
+                <a:solidFill>
+                  <a:srgbClr val="FFFFFF"/>
+                </a:solidFill>
+                <a:latin typeface="Courier Prime"/>
+                <a:ea typeface="Courier Prime"/>
+                <a:cs typeface="Courier Prime"/>
+                <a:sym typeface="Courier Prime"/>
+              </a:rPr>
+              <a:t>Ambas </a:t>
+            </a:r>
+            <a:r>
+              <a:rPr lang="en-US" sz="2100" dirty="0" err="1">
+                <a:solidFill>
+                  <a:srgbClr val="FFFFFF"/>
+                </a:solidFill>
+                <a:latin typeface="Courier Prime"/>
+                <a:ea typeface="Courier Prime"/>
+                <a:cs typeface="Courier Prime"/>
+                <a:sym typeface="Courier Prime"/>
+              </a:rPr>
+              <a:t>funciones</a:t>
+            </a:r>
+            <a:r>
+              <a:rPr lang="en-US" sz="2100" dirty="0">
+                <a:solidFill>
+                  <a:srgbClr val="FFFFFF"/>
+                </a:solidFill>
+                <a:latin typeface="Courier Prime"/>
+                <a:ea typeface="Courier Prime"/>
+                <a:cs typeface="Courier Prime"/>
+                <a:sym typeface="Courier Prime"/>
+              </a:rPr>
+              <a:t> </a:t>
+            </a:r>
+            <a:r>
+              <a:rPr lang="en-US" sz="2100" dirty="0" err="1">
+                <a:solidFill>
+                  <a:srgbClr val="FFFFFF"/>
+                </a:solidFill>
+                <a:latin typeface="Courier Prime"/>
+                <a:ea typeface="Courier Prime"/>
+                <a:cs typeface="Courier Prime"/>
+                <a:sym typeface="Courier Prime"/>
+              </a:rPr>
+              <a:t>están</a:t>
+            </a:r>
+            <a:r>
+              <a:rPr lang="en-US" sz="2100" dirty="0">
+                <a:solidFill>
+                  <a:srgbClr val="FFFFFF"/>
+                </a:solidFill>
+                <a:latin typeface="Courier Prime"/>
+                <a:ea typeface="Courier Prime"/>
+                <a:cs typeface="Courier Prime"/>
+                <a:sym typeface="Courier Prime"/>
+              </a:rPr>
+              <a:t> </a:t>
+            </a:r>
+            <a:r>
+              <a:rPr lang="en-US" sz="2100" dirty="0" err="1">
+                <a:solidFill>
+                  <a:srgbClr val="FFFFFF"/>
+                </a:solidFill>
+                <a:latin typeface="Courier Prime"/>
+                <a:ea typeface="Courier Prime"/>
+                <a:cs typeface="Courier Prime"/>
+                <a:sym typeface="Courier Prime"/>
+              </a:rPr>
+              <a:t>diseñadas</a:t>
+            </a:r>
+            <a:r>
+              <a:rPr lang="en-US" sz="2100" dirty="0">
+                <a:solidFill>
+                  <a:srgbClr val="FFFFFF"/>
+                </a:solidFill>
+                <a:latin typeface="Courier Prime"/>
+                <a:ea typeface="Courier Prime"/>
+                <a:cs typeface="Courier Prime"/>
+                <a:sym typeface="Courier Prime"/>
+              </a:rPr>
+              <a:t> para </a:t>
+            </a:r>
+            <a:r>
+              <a:rPr lang="en-US" sz="2100" dirty="0" err="1">
+                <a:solidFill>
+                  <a:srgbClr val="FFFFFF"/>
+                </a:solidFill>
+                <a:latin typeface="Courier Prime"/>
+                <a:ea typeface="Courier Prime"/>
+                <a:cs typeface="Courier Prime"/>
+                <a:sym typeface="Courier Prime"/>
+              </a:rPr>
+              <a:t>buscar</a:t>
+            </a:r>
+            <a:r>
+              <a:rPr lang="en-US" sz="2100" dirty="0">
+                <a:solidFill>
+                  <a:srgbClr val="FFFFFF"/>
+                </a:solidFill>
+                <a:latin typeface="Courier Prime"/>
+                <a:ea typeface="Courier Prime"/>
+                <a:cs typeface="Courier Prime"/>
+                <a:sym typeface="Courier Prime"/>
+              </a:rPr>
+              <a:t> </a:t>
+            </a:r>
+            <a:r>
+              <a:rPr lang="en-US" sz="2100" dirty="0" err="1">
+                <a:solidFill>
+                  <a:srgbClr val="FFFFFF"/>
+                </a:solidFill>
+                <a:latin typeface="Courier Prime"/>
+                <a:ea typeface="Courier Prime"/>
+                <a:cs typeface="Courier Prime"/>
+                <a:sym typeface="Courier Prime"/>
+              </a:rPr>
+              <a:t>en</a:t>
+            </a:r>
+            <a:r>
+              <a:rPr lang="en-US" sz="2100" dirty="0">
+                <a:solidFill>
+                  <a:srgbClr val="FFFFFF"/>
+                </a:solidFill>
+                <a:latin typeface="Courier Prime"/>
+                <a:ea typeface="Courier Prime"/>
+                <a:cs typeface="Courier Prime"/>
+                <a:sym typeface="Courier Prime"/>
+              </a:rPr>
+              <a:t> </a:t>
+            </a:r>
+            <a:r>
+              <a:rPr lang="en-US" sz="2100" dirty="0" err="1">
+                <a:solidFill>
+                  <a:srgbClr val="FFFFFF"/>
+                </a:solidFill>
+                <a:latin typeface="Courier Prime"/>
+                <a:ea typeface="Courier Prime"/>
+                <a:cs typeface="Courier Prime"/>
+                <a:sym typeface="Courier Prime"/>
+              </a:rPr>
+              <a:t>el</a:t>
+            </a:r>
+            <a:r>
+              <a:rPr lang="en-US" sz="2100" dirty="0">
+                <a:solidFill>
+                  <a:srgbClr val="FFFFFF"/>
+                </a:solidFill>
+                <a:latin typeface="Courier Prime"/>
+                <a:ea typeface="Courier Prime"/>
+                <a:cs typeface="Courier Prime"/>
+                <a:sym typeface="Courier Prime"/>
+              </a:rPr>
+              <a:t> </a:t>
+            </a:r>
+            <a:r>
+              <a:rPr lang="en-US" sz="2100" dirty="0" err="1">
+                <a:solidFill>
+                  <a:srgbClr val="FFFFFF"/>
+                </a:solidFill>
+                <a:latin typeface="Courier Prime"/>
+                <a:ea typeface="Courier Prime"/>
+                <a:cs typeface="Courier Prime"/>
+                <a:sym typeface="Courier Prime"/>
+              </a:rPr>
+              <a:t>directorio</a:t>
+            </a:r>
+            <a:r>
+              <a:rPr lang="en-US" sz="2100" dirty="0">
+                <a:solidFill>
+                  <a:srgbClr val="FFFFFF"/>
+                </a:solidFill>
+                <a:latin typeface="Courier Prime"/>
+                <a:ea typeface="Courier Prime"/>
+                <a:cs typeface="Courier Prime"/>
+                <a:sym typeface="Courier Prime"/>
+              </a:rPr>
+              <a:t> de </a:t>
+            </a:r>
+            <a:r>
+              <a:rPr lang="en-US" sz="2100" dirty="0" err="1">
+                <a:solidFill>
+                  <a:srgbClr val="FFFFFF"/>
+                </a:solidFill>
+                <a:latin typeface="Courier Prime"/>
+                <a:ea typeface="Courier Prime"/>
+                <a:cs typeface="Courier Prime"/>
+                <a:sym typeface="Courier Prime"/>
+              </a:rPr>
+              <a:t>cada</a:t>
+            </a:r>
+            <a:r>
+              <a:rPr lang="en-US" sz="2100" dirty="0">
+                <a:solidFill>
+                  <a:srgbClr val="FFFFFF"/>
+                </a:solidFill>
+                <a:latin typeface="Courier Prime"/>
+                <a:ea typeface="Courier Prime"/>
+                <a:cs typeface="Courier Prime"/>
+                <a:sym typeface="Courier Prime"/>
+              </a:rPr>
+              <a:t> PC </a:t>
+            </a:r>
+            <a:r>
+              <a:rPr lang="en-US" sz="2100" dirty="0" err="1">
+                <a:solidFill>
+                  <a:srgbClr val="FFFFFF"/>
+                </a:solidFill>
+                <a:latin typeface="Courier Prime"/>
+                <a:ea typeface="Courier Prime"/>
+                <a:cs typeface="Courier Prime"/>
+                <a:sym typeface="Courier Prime"/>
+              </a:rPr>
+              <a:t>carpetas</a:t>
+            </a:r>
+            <a:r>
+              <a:rPr lang="en-US" sz="2100" dirty="0">
+                <a:solidFill>
+                  <a:srgbClr val="FFFFFF"/>
+                </a:solidFill>
+                <a:latin typeface="Courier Prime"/>
+                <a:ea typeface="Courier Prime"/>
+                <a:cs typeface="Courier Prime"/>
+                <a:sym typeface="Courier Prime"/>
+              </a:rPr>
+              <a:t> con </a:t>
+            </a:r>
+            <a:r>
+              <a:rPr lang="en-US" sz="2100" dirty="0" err="1">
+                <a:solidFill>
+                  <a:srgbClr val="FFFFFF"/>
+                </a:solidFill>
+                <a:latin typeface="Courier Prime"/>
+                <a:ea typeface="Courier Prime"/>
+                <a:cs typeface="Courier Prime"/>
+                <a:sym typeface="Courier Prime"/>
+              </a:rPr>
+              <a:t>el</a:t>
+            </a:r>
+            <a:r>
+              <a:rPr lang="en-US" sz="2100" dirty="0">
+                <a:solidFill>
+                  <a:srgbClr val="FFFFFF"/>
+                </a:solidFill>
+                <a:latin typeface="Courier Prime"/>
+                <a:ea typeface="Courier Prime"/>
+                <a:cs typeface="Courier Prime"/>
+                <a:sym typeface="Courier Prime"/>
+              </a:rPr>
+              <a:t> </a:t>
+            </a:r>
+            <a:r>
+              <a:rPr lang="en-US" sz="2100" dirty="0" err="1">
+                <a:solidFill>
+                  <a:srgbClr val="FFFFFF"/>
+                </a:solidFill>
+                <a:latin typeface="Courier Prime"/>
+                <a:ea typeface="Courier Prime"/>
+                <a:cs typeface="Courier Prime"/>
+                <a:sym typeface="Courier Prime"/>
+              </a:rPr>
+              <a:t>mínimo</a:t>
+            </a:r>
+            <a:r>
+              <a:rPr lang="en-US" sz="2100" dirty="0">
+                <a:solidFill>
+                  <a:srgbClr val="FFFFFF"/>
+                </a:solidFill>
+                <a:latin typeface="Courier Prime"/>
+                <a:ea typeface="Courier Prime"/>
+                <a:cs typeface="Courier Prime"/>
+                <a:sym typeface="Courier Prime"/>
+              </a:rPr>
+              <a:t> de </a:t>
+            </a:r>
+            <a:r>
+              <a:rPr lang="en-US" sz="2100" dirty="0" err="1">
+                <a:solidFill>
+                  <a:srgbClr val="FFFFFF"/>
+                </a:solidFill>
+                <a:latin typeface="Courier Prime"/>
+                <a:ea typeface="Courier Prime"/>
+                <a:cs typeface="Courier Prime"/>
+                <a:sym typeface="Courier Prime"/>
+              </a:rPr>
+              <a:t>imágenes</a:t>
+            </a:r>
+            <a:r>
+              <a:rPr lang="en-US" sz="2100" dirty="0">
+                <a:solidFill>
+                  <a:srgbClr val="FFFFFF"/>
+                </a:solidFill>
+                <a:latin typeface="Courier Prime"/>
+                <a:ea typeface="Courier Prime"/>
+                <a:cs typeface="Courier Prime"/>
+                <a:sym typeface="Courier Prime"/>
+              </a:rPr>
+              <a:t> </a:t>
+            </a:r>
+            <a:r>
+              <a:rPr lang="en-US" sz="2100" dirty="0" err="1">
+                <a:solidFill>
+                  <a:srgbClr val="FFFFFF"/>
+                </a:solidFill>
+                <a:latin typeface="Courier Prime"/>
+                <a:ea typeface="Courier Prime"/>
+                <a:cs typeface="Courier Prime"/>
+                <a:sym typeface="Courier Prime"/>
+              </a:rPr>
+              <a:t>requeridas</a:t>
+            </a:r>
+            <a:r>
+              <a:rPr lang="en-US" sz="2100" dirty="0">
+                <a:solidFill>
+                  <a:srgbClr val="FFFFFF"/>
+                </a:solidFill>
+                <a:latin typeface="Courier Prime"/>
+                <a:ea typeface="Courier Prime"/>
+                <a:cs typeface="Courier Prime"/>
+                <a:sym typeface="Courier Prime"/>
+              </a:rPr>
+              <a:t> para </a:t>
+            </a:r>
+            <a:r>
+              <a:rPr lang="en-US" sz="2100" dirty="0" err="1">
+                <a:solidFill>
+                  <a:srgbClr val="FFFFFF"/>
+                </a:solidFill>
+                <a:latin typeface="Courier Prime"/>
+                <a:ea typeface="Courier Prime"/>
+                <a:cs typeface="Courier Prime"/>
+                <a:sym typeface="Courier Prime"/>
+              </a:rPr>
+              <a:t>continuar</a:t>
+            </a:r>
+            <a:r>
+              <a:rPr lang="en-US" sz="2100" dirty="0">
+                <a:solidFill>
+                  <a:srgbClr val="FFFFFF"/>
+                </a:solidFill>
+                <a:latin typeface="Courier Prime"/>
+                <a:ea typeface="Courier Prime"/>
+                <a:cs typeface="Courier Prime"/>
+                <a:sym typeface="Courier Prime"/>
+              </a:rPr>
+              <a:t> con la </a:t>
+            </a:r>
+            <a:r>
+              <a:rPr lang="en-US" sz="2100" dirty="0" err="1">
+                <a:solidFill>
+                  <a:srgbClr val="FFFFFF"/>
+                </a:solidFill>
+                <a:latin typeface="Courier Prime"/>
+                <a:ea typeface="Courier Prime"/>
+                <a:cs typeface="Courier Prime"/>
+                <a:sym typeface="Courier Prime"/>
+              </a:rPr>
+              <a:t>correcta</a:t>
+            </a:r>
+            <a:r>
+              <a:rPr lang="en-US" sz="2100" dirty="0">
+                <a:solidFill>
+                  <a:srgbClr val="FFFFFF"/>
+                </a:solidFill>
+                <a:latin typeface="Courier Prime"/>
+                <a:ea typeface="Courier Prime"/>
+                <a:cs typeface="Courier Prime"/>
+                <a:sym typeface="Courier Prime"/>
+              </a:rPr>
+              <a:t> </a:t>
+            </a:r>
+            <a:r>
+              <a:rPr lang="en-US" sz="2100" dirty="0" err="1">
+                <a:solidFill>
+                  <a:srgbClr val="FFFFFF"/>
+                </a:solidFill>
+                <a:latin typeface="Courier Prime"/>
+                <a:ea typeface="Courier Prime"/>
+                <a:cs typeface="Courier Prime"/>
+                <a:sym typeface="Courier Prime"/>
+              </a:rPr>
+              <a:t>ejecución</a:t>
+            </a:r>
+            <a:r>
+              <a:rPr lang="en-US" sz="2100" dirty="0">
+                <a:solidFill>
+                  <a:srgbClr val="FFFFFF"/>
+                </a:solidFill>
+                <a:latin typeface="Courier Prime"/>
+                <a:ea typeface="Courier Prime"/>
+                <a:cs typeface="Courier Prime"/>
+                <a:sym typeface="Courier Prime"/>
+              </a:rPr>
+              <a:t> del </a:t>
+            </a:r>
+            <a:r>
+              <a:rPr lang="en-US" sz="2100" dirty="0" err="1">
+                <a:solidFill>
+                  <a:srgbClr val="FFFFFF"/>
+                </a:solidFill>
+                <a:latin typeface="Courier Prime"/>
+                <a:ea typeface="Courier Prime"/>
+                <a:cs typeface="Courier Prime"/>
+                <a:sym typeface="Courier Prime"/>
+              </a:rPr>
+              <a:t>programa</a:t>
+            </a:r>
+            <a:r>
+              <a:rPr lang="en-US" sz="2100" dirty="0">
+                <a:solidFill>
+                  <a:srgbClr val="FFFFFF"/>
+                </a:solidFill>
+                <a:latin typeface="Courier Prime"/>
+                <a:ea typeface="Courier Prime"/>
+                <a:cs typeface="Courier Prime"/>
+                <a:sym typeface="Courier Prime"/>
+              </a:rPr>
+              <a:t>.</a:t>
+            </a:r>
+          </a:p>
+        </p:txBody>
+      </p:sp>
+      <p:sp>
+        <p:nvSpPr>
+          <p:cNvPr id="17" name="TextBox 17"/>
+          <p:cNvSpPr txBox="1"/>
           <p:nvPr/>
         </p:nvSpPr>
         <p:spPr>
-          <a:xfrm rot="0">
-            <a:off x="2962671" y="5305001"/>
+          <a:xfrm>
+            <a:off x="2986481" y="6863479"/>
             <a:ext cx="4484787" cy="461772"/>
           </a:xfrm>
           <a:prstGeom prst="rect">
@@ -4718,7 +5134,7 @@
           </a:prstGeom>
         </p:spPr>
         <p:txBody>
-          <a:bodyPr anchor="t" rtlCol="false" tIns="0" lIns="0" bIns="0" rIns="0">
+          <a:bodyPr lIns="0" tIns="0" rIns="0" bIns="0" rtlCol="0" anchor="t">
             <a:spAutoFit/>
           </a:bodyPr>
           <a:lstStyle/>
@@ -4732,7 +5148,7 @@
               </a:spcBef>
             </a:pPr>
             <a:r>
-              <a:rPr lang="en-US" sz="3100">
+              <a:rPr lang="en-US" sz="3100" dirty="0">
                 <a:solidFill>
                   <a:srgbClr val="FD9E80"/>
                 </a:solidFill>
@@ -4741,20 +5157,41 @@
                 <a:cs typeface="Courier Prime"/>
                 <a:sym typeface="Courier Prime"/>
               </a:rPr>
-              <a:t>def generar_reporte</a:t>
-            </a:r>
-          </a:p>
-        </p:txBody>
-      </p:sp>
-      <p:sp>
-        <p:nvSpPr>
-          <p:cNvPr name="TextBox 18" id="18"/>
-          <p:cNvSpPr txBox="true"/>
+              <a:t>def </a:t>
+            </a:r>
+            <a:r>
+              <a:rPr lang="en-US" sz="3100" dirty="0" err="1">
+                <a:solidFill>
+                  <a:srgbClr val="FD9E80"/>
+                </a:solidFill>
+                <a:latin typeface="Courier Prime"/>
+                <a:ea typeface="Courier Prime"/>
+                <a:cs typeface="Courier Prime"/>
+                <a:sym typeface="Courier Prime"/>
+              </a:rPr>
+              <a:t>generar_reporte</a:t>
+            </a:r>
+            <a:endParaRPr lang="en-US" sz="3100" dirty="0">
+              <a:solidFill>
+                <a:srgbClr val="FD9E80"/>
+              </a:solidFill>
+              <a:latin typeface="Courier Prime"/>
+              <a:ea typeface="Courier Prime"/>
+              <a:cs typeface="Courier Prime"/>
+              <a:sym typeface="Courier Prime"/>
+            </a:endParaRPr>
+          </a:p>
+        </p:txBody>
+      </p:sp>
+      <p:sp>
+        <p:nvSpPr>
+          <p:cNvPr id="18" name="TextBox 18"/>
+          <p:cNvSpPr txBox="1"/>
           <p:nvPr/>
         </p:nvSpPr>
         <p:spPr>
-          <a:xfrm rot="0">
-            <a:off x="11886044" y="4354598"/>
+          <a:xfrm>
+            <a:off x="11512315" y="2956921"/>
             <a:ext cx="4720828" cy="461772"/>
           </a:xfrm>
           <a:prstGeom prst="rect">
@@ -4762,7 +5199,7 @@
           </a:prstGeom>
         </p:spPr>
         <p:txBody>
-          <a:bodyPr anchor="t" rtlCol="false" tIns="0" lIns="0" bIns="0" rIns="0">
+          <a:bodyPr lIns="0" tIns="0" rIns="0" bIns="0" rtlCol="0" anchor="t">
             <a:spAutoFit/>
           </a:bodyPr>
           <a:lstStyle/>
@@ -4792,21 +5229,21 @@
       </p:sp>
       <p:sp>
         <p:nvSpPr>
-          <p:cNvPr name="TextBox 19" id="19"/>
-          <p:cNvSpPr txBox="true"/>
+          <p:cNvPr id="19" name="TextBox 19"/>
+          <p:cNvSpPr txBox="1"/>
           <p:nvPr/>
         </p:nvSpPr>
         <p:spPr>
-          <a:xfrm rot="0">
-            <a:off x="1664443" y="5785824"/>
-            <a:ext cx="7081242" cy="1482852"/>
+          <a:xfrm>
+            <a:off x="1995211" y="7904004"/>
+            <a:ext cx="6467328" cy="1542730"/>
           </a:xfrm>
           <a:prstGeom prst="rect">
             <a:avLst/>
           </a:prstGeom>
         </p:spPr>
         <p:txBody>
-          <a:bodyPr anchor="t" rtlCol="false" tIns="0" lIns="0" bIns="0" rIns="0">
+          <a:bodyPr wrap="square" lIns="0" tIns="0" rIns="0" bIns="0" rtlCol="0" anchor="t">
             <a:spAutoFit/>
           </a:bodyPr>
           <a:lstStyle/>
@@ -4820,29 +5257,461 @@
               </a:spcBef>
             </a:pPr>
             <a:r>
-              <a:rPr lang="en-US" sz="2100">
-                <a:solidFill>
-                  <a:srgbClr val="FFFFFF"/>
-                </a:solidFill>
-                <a:latin typeface="Courier Prime"/>
-                <a:ea typeface="Courier Prime"/>
-                <a:cs typeface="Courier Prime"/>
-                <a:sym typeface="Courier Prime"/>
-              </a:rPr>
-              <a:t>Esta función en específico sirve para generar un archivo temporal .txt que le permite ver al usuario la cantidad de pixeles del objeto, coordenadas de todos los pixeles entre otras cosas.</a:t>
-            </a:r>
-          </a:p>
-        </p:txBody>
-      </p:sp>
-      <p:sp>
-        <p:nvSpPr>
-          <p:cNvPr name="TextBox 20" id="20"/>
-          <p:cNvSpPr txBox="true"/>
+              <a:rPr lang="en-US" sz="2100" dirty="0">
+                <a:solidFill>
+                  <a:srgbClr val="FFFFFF"/>
+                </a:solidFill>
+                <a:latin typeface="Courier Prime"/>
+                <a:ea typeface="Courier Prime"/>
+                <a:cs typeface="Courier Prime"/>
+                <a:sym typeface="Courier Prime"/>
+              </a:rPr>
+              <a:t>Esta </a:t>
+            </a:r>
+            <a:r>
+              <a:rPr lang="en-US" sz="2100" dirty="0" err="1">
+                <a:solidFill>
+                  <a:srgbClr val="FFFFFF"/>
+                </a:solidFill>
+                <a:latin typeface="Courier Prime"/>
+                <a:ea typeface="Courier Prime"/>
+                <a:cs typeface="Courier Prime"/>
+                <a:sym typeface="Courier Prime"/>
+              </a:rPr>
+              <a:t>función</a:t>
+            </a:r>
+            <a:r>
+              <a:rPr lang="en-US" sz="2100" dirty="0">
+                <a:solidFill>
+                  <a:srgbClr val="FFFFFF"/>
+                </a:solidFill>
+                <a:latin typeface="Courier Prime"/>
+                <a:ea typeface="Courier Prime"/>
+                <a:cs typeface="Courier Prime"/>
+                <a:sym typeface="Courier Prime"/>
+              </a:rPr>
+              <a:t> </a:t>
+            </a:r>
+            <a:r>
+              <a:rPr lang="en-US" sz="2100" dirty="0" err="1">
+                <a:solidFill>
+                  <a:srgbClr val="FFFFFF"/>
+                </a:solidFill>
+                <a:latin typeface="Courier Prime"/>
+                <a:ea typeface="Courier Prime"/>
+                <a:cs typeface="Courier Prime"/>
+                <a:sym typeface="Courier Prime"/>
+              </a:rPr>
+              <a:t>en</a:t>
+            </a:r>
+            <a:r>
+              <a:rPr lang="en-US" sz="2100" dirty="0">
+                <a:solidFill>
+                  <a:srgbClr val="FFFFFF"/>
+                </a:solidFill>
+                <a:latin typeface="Courier Prime"/>
+                <a:ea typeface="Courier Prime"/>
+                <a:cs typeface="Courier Prime"/>
+                <a:sym typeface="Courier Prime"/>
+              </a:rPr>
+              <a:t> </a:t>
+            </a:r>
+            <a:r>
+              <a:rPr lang="en-US" sz="2100" dirty="0" err="1">
+                <a:solidFill>
+                  <a:srgbClr val="FFFFFF"/>
+                </a:solidFill>
+                <a:latin typeface="Courier Prime"/>
+                <a:ea typeface="Courier Prime"/>
+                <a:cs typeface="Courier Prime"/>
+                <a:sym typeface="Courier Prime"/>
+              </a:rPr>
+              <a:t>específico</a:t>
+            </a:r>
+            <a:r>
+              <a:rPr lang="en-US" sz="2100" dirty="0">
+                <a:solidFill>
+                  <a:srgbClr val="FFFFFF"/>
+                </a:solidFill>
+                <a:latin typeface="Courier Prime"/>
+                <a:ea typeface="Courier Prime"/>
+                <a:cs typeface="Courier Prime"/>
+                <a:sym typeface="Courier Prime"/>
+              </a:rPr>
+              <a:t> </a:t>
+            </a:r>
+            <a:r>
+              <a:rPr lang="en-US" sz="2100" dirty="0" err="1">
+                <a:solidFill>
+                  <a:srgbClr val="FFFFFF"/>
+                </a:solidFill>
+                <a:latin typeface="Courier Prime"/>
+                <a:ea typeface="Courier Prime"/>
+                <a:cs typeface="Courier Prime"/>
+                <a:sym typeface="Courier Prime"/>
+              </a:rPr>
+              <a:t>sirve</a:t>
+            </a:r>
+            <a:r>
+              <a:rPr lang="en-US" sz="2100" dirty="0">
+                <a:solidFill>
+                  <a:srgbClr val="FFFFFF"/>
+                </a:solidFill>
+                <a:latin typeface="Courier Prime"/>
+                <a:ea typeface="Courier Prime"/>
+                <a:cs typeface="Courier Prime"/>
+                <a:sym typeface="Courier Prime"/>
+              </a:rPr>
+              <a:t> para </a:t>
+            </a:r>
+            <a:r>
+              <a:rPr lang="en-US" sz="2100" dirty="0" err="1">
+                <a:solidFill>
+                  <a:srgbClr val="FFFFFF"/>
+                </a:solidFill>
+                <a:latin typeface="Courier Prime"/>
+                <a:ea typeface="Courier Prime"/>
+                <a:cs typeface="Courier Prime"/>
+                <a:sym typeface="Courier Prime"/>
+              </a:rPr>
+              <a:t>generar</a:t>
+            </a:r>
+            <a:r>
+              <a:rPr lang="en-US" sz="2100" dirty="0">
+                <a:solidFill>
+                  <a:srgbClr val="FFFFFF"/>
+                </a:solidFill>
+                <a:latin typeface="Courier Prime"/>
+                <a:ea typeface="Courier Prime"/>
+                <a:cs typeface="Courier Prime"/>
+                <a:sym typeface="Courier Prime"/>
+              </a:rPr>
+              <a:t> un </a:t>
+            </a:r>
+            <a:r>
+              <a:rPr lang="en-US" sz="2100" dirty="0" err="1">
+                <a:solidFill>
+                  <a:srgbClr val="FFFFFF"/>
+                </a:solidFill>
+                <a:latin typeface="Courier Prime"/>
+                <a:ea typeface="Courier Prime"/>
+                <a:cs typeface="Courier Prime"/>
+                <a:sym typeface="Courier Prime"/>
+              </a:rPr>
+              <a:t>archivo</a:t>
+            </a:r>
+            <a:r>
+              <a:rPr lang="en-US" sz="2100" dirty="0">
+                <a:solidFill>
+                  <a:srgbClr val="FFFFFF"/>
+                </a:solidFill>
+                <a:latin typeface="Courier Prime"/>
+                <a:ea typeface="Courier Prime"/>
+                <a:cs typeface="Courier Prime"/>
+                <a:sym typeface="Courier Prime"/>
+              </a:rPr>
+              <a:t> temporal .txt que le </a:t>
+            </a:r>
+            <a:r>
+              <a:rPr lang="en-US" sz="2100" dirty="0" err="1">
+                <a:solidFill>
+                  <a:srgbClr val="FFFFFF"/>
+                </a:solidFill>
+                <a:latin typeface="Courier Prime"/>
+                <a:ea typeface="Courier Prime"/>
+                <a:cs typeface="Courier Prime"/>
+                <a:sym typeface="Courier Prime"/>
+              </a:rPr>
+              <a:t>permite</a:t>
+            </a:r>
+            <a:r>
+              <a:rPr lang="en-US" sz="2100" dirty="0">
+                <a:solidFill>
+                  <a:srgbClr val="FFFFFF"/>
+                </a:solidFill>
+                <a:latin typeface="Courier Prime"/>
+                <a:ea typeface="Courier Prime"/>
+                <a:cs typeface="Courier Prime"/>
+                <a:sym typeface="Courier Prime"/>
+              </a:rPr>
+              <a:t> </a:t>
+            </a:r>
+            <a:r>
+              <a:rPr lang="en-US" sz="2100" dirty="0" err="1">
+                <a:solidFill>
+                  <a:srgbClr val="FFFFFF"/>
+                </a:solidFill>
+                <a:latin typeface="Courier Prime"/>
+                <a:ea typeface="Courier Prime"/>
+                <a:cs typeface="Courier Prime"/>
+                <a:sym typeface="Courier Prime"/>
+              </a:rPr>
+              <a:t>ver</a:t>
+            </a:r>
+            <a:r>
+              <a:rPr lang="en-US" sz="2100" dirty="0">
+                <a:solidFill>
+                  <a:srgbClr val="FFFFFF"/>
+                </a:solidFill>
+                <a:latin typeface="Courier Prime"/>
+                <a:ea typeface="Courier Prime"/>
+                <a:cs typeface="Courier Prime"/>
+                <a:sym typeface="Courier Prime"/>
+              </a:rPr>
+              <a:t> al </a:t>
+            </a:r>
+            <a:r>
+              <a:rPr lang="en-US" sz="2100" dirty="0" err="1">
+                <a:solidFill>
+                  <a:srgbClr val="FFFFFF"/>
+                </a:solidFill>
+                <a:latin typeface="Courier Prime"/>
+                <a:ea typeface="Courier Prime"/>
+                <a:cs typeface="Courier Prime"/>
+                <a:sym typeface="Courier Prime"/>
+              </a:rPr>
+              <a:t>usuario</a:t>
+            </a:r>
+            <a:r>
+              <a:rPr lang="en-US" sz="2100" dirty="0">
+                <a:solidFill>
+                  <a:srgbClr val="FFFFFF"/>
+                </a:solidFill>
+                <a:latin typeface="Courier Prime"/>
+                <a:ea typeface="Courier Prime"/>
+                <a:cs typeface="Courier Prime"/>
+                <a:sym typeface="Courier Prime"/>
+              </a:rPr>
+              <a:t> la </a:t>
+            </a:r>
+            <a:r>
+              <a:rPr lang="en-US" sz="2100" dirty="0" err="1">
+                <a:solidFill>
+                  <a:srgbClr val="FFFFFF"/>
+                </a:solidFill>
+                <a:latin typeface="Courier Prime"/>
+                <a:ea typeface="Courier Prime"/>
+                <a:cs typeface="Courier Prime"/>
+                <a:sym typeface="Courier Prime"/>
+              </a:rPr>
+              <a:t>cantidad</a:t>
+            </a:r>
+            <a:r>
+              <a:rPr lang="en-US" sz="2100" dirty="0">
+                <a:solidFill>
+                  <a:srgbClr val="FFFFFF"/>
+                </a:solidFill>
+                <a:latin typeface="Courier Prime"/>
+                <a:ea typeface="Courier Prime"/>
+                <a:cs typeface="Courier Prime"/>
+                <a:sym typeface="Courier Prime"/>
+              </a:rPr>
+              <a:t> de </a:t>
+            </a:r>
+            <a:r>
+              <a:rPr lang="en-US" sz="2100" dirty="0" err="1">
+                <a:solidFill>
+                  <a:srgbClr val="FFFFFF"/>
+                </a:solidFill>
+                <a:latin typeface="Courier Prime"/>
+                <a:ea typeface="Courier Prime"/>
+                <a:cs typeface="Courier Prime"/>
+                <a:sym typeface="Courier Prime"/>
+              </a:rPr>
+              <a:t>pixeles</a:t>
+            </a:r>
+            <a:r>
+              <a:rPr lang="en-US" sz="2100" dirty="0">
+                <a:solidFill>
+                  <a:srgbClr val="FFFFFF"/>
+                </a:solidFill>
+                <a:latin typeface="Courier Prime"/>
+                <a:ea typeface="Courier Prime"/>
+                <a:cs typeface="Courier Prime"/>
+                <a:sym typeface="Courier Prime"/>
+              </a:rPr>
+              <a:t> del </a:t>
+            </a:r>
+            <a:r>
+              <a:rPr lang="en-US" sz="2100" dirty="0" err="1">
+                <a:solidFill>
+                  <a:srgbClr val="FFFFFF"/>
+                </a:solidFill>
+                <a:latin typeface="Courier Prime"/>
+                <a:ea typeface="Courier Prime"/>
+                <a:cs typeface="Courier Prime"/>
+                <a:sym typeface="Courier Prime"/>
+              </a:rPr>
+              <a:t>objeto</a:t>
+            </a:r>
+            <a:r>
+              <a:rPr lang="en-US" sz="2100" dirty="0">
+                <a:solidFill>
+                  <a:srgbClr val="FFFFFF"/>
+                </a:solidFill>
+                <a:latin typeface="Courier Prime"/>
+                <a:ea typeface="Courier Prime"/>
+                <a:cs typeface="Courier Prime"/>
+                <a:sym typeface="Courier Prime"/>
+              </a:rPr>
+              <a:t>, </a:t>
+            </a:r>
+            <a:r>
+              <a:rPr lang="en-US" sz="2100" dirty="0" err="1">
+                <a:solidFill>
+                  <a:srgbClr val="FFFFFF"/>
+                </a:solidFill>
+                <a:latin typeface="Courier Prime"/>
+                <a:ea typeface="Courier Prime"/>
+                <a:cs typeface="Courier Prime"/>
+                <a:sym typeface="Courier Prime"/>
+              </a:rPr>
+              <a:t>coordenadas</a:t>
+            </a:r>
+            <a:r>
+              <a:rPr lang="en-US" sz="2100" dirty="0">
+                <a:solidFill>
+                  <a:srgbClr val="FFFFFF"/>
+                </a:solidFill>
+                <a:latin typeface="Courier Prime"/>
+                <a:ea typeface="Courier Prime"/>
+                <a:cs typeface="Courier Prime"/>
+                <a:sym typeface="Courier Prime"/>
+              </a:rPr>
+              <a:t> de </a:t>
+            </a:r>
+            <a:r>
+              <a:rPr lang="en-US" sz="2100" dirty="0" err="1">
+                <a:solidFill>
+                  <a:srgbClr val="FFFFFF"/>
+                </a:solidFill>
+                <a:latin typeface="Courier Prime"/>
+                <a:ea typeface="Courier Prime"/>
+                <a:cs typeface="Courier Prime"/>
+                <a:sym typeface="Courier Prime"/>
+              </a:rPr>
+              <a:t>todos</a:t>
+            </a:r>
+            <a:r>
+              <a:rPr lang="en-US" sz="2100" dirty="0">
+                <a:solidFill>
+                  <a:srgbClr val="FFFFFF"/>
+                </a:solidFill>
+                <a:latin typeface="Courier Prime"/>
+                <a:ea typeface="Courier Prime"/>
+                <a:cs typeface="Courier Prime"/>
+                <a:sym typeface="Courier Prime"/>
+              </a:rPr>
+              <a:t> </a:t>
+            </a:r>
+            <a:r>
+              <a:rPr lang="en-US" sz="2100" dirty="0" err="1">
+                <a:solidFill>
+                  <a:srgbClr val="FFFFFF"/>
+                </a:solidFill>
+                <a:latin typeface="Courier Prime"/>
+                <a:ea typeface="Courier Prime"/>
+                <a:cs typeface="Courier Prime"/>
+                <a:sym typeface="Courier Prime"/>
+              </a:rPr>
+              <a:t>los</a:t>
+            </a:r>
+            <a:r>
+              <a:rPr lang="en-US" sz="2100" dirty="0">
+                <a:solidFill>
+                  <a:srgbClr val="FFFFFF"/>
+                </a:solidFill>
+                <a:latin typeface="Courier Prime"/>
+                <a:ea typeface="Courier Prime"/>
+                <a:cs typeface="Courier Prime"/>
+                <a:sym typeface="Courier Prime"/>
+              </a:rPr>
+              <a:t> </a:t>
+            </a:r>
+            <a:r>
+              <a:rPr lang="en-US" sz="2100" dirty="0" err="1">
+                <a:solidFill>
+                  <a:srgbClr val="FFFFFF"/>
+                </a:solidFill>
+                <a:latin typeface="Courier Prime"/>
+                <a:ea typeface="Courier Prime"/>
+                <a:cs typeface="Courier Prime"/>
+                <a:sym typeface="Courier Prime"/>
+              </a:rPr>
+              <a:t>pixeles</a:t>
+            </a:r>
+            <a:r>
+              <a:rPr lang="en-US" sz="2100" dirty="0">
+                <a:solidFill>
+                  <a:srgbClr val="FFFFFF"/>
+                </a:solidFill>
+                <a:latin typeface="Courier Prime"/>
+                <a:ea typeface="Courier Prime"/>
+                <a:cs typeface="Courier Prime"/>
+                <a:sym typeface="Courier Prime"/>
+              </a:rPr>
+              <a:t> entre </a:t>
+            </a:r>
+            <a:r>
+              <a:rPr lang="en-US" sz="2100" dirty="0" err="1">
+                <a:solidFill>
+                  <a:srgbClr val="FFFFFF"/>
+                </a:solidFill>
+                <a:latin typeface="Courier Prime"/>
+                <a:ea typeface="Courier Prime"/>
+                <a:cs typeface="Courier Prime"/>
+                <a:sym typeface="Courier Prime"/>
+              </a:rPr>
+              <a:t>otras</a:t>
+            </a:r>
+            <a:r>
+              <a:rPr lang="en-US" sz="2100" dirty="0">
+                <a:solidFill>
+                  <a:srgbClr val="FFFFFF"/>
+                </a:solidFill>
+                <a:latin typeface="Courier Prime"/>
+                <a:ea typeface="Courier Prime"/>
+                <a:cs typeface="Courier Prime"/>
+                <a:sym typeface="Courier Prime"/>
+              </a:rPr>
+              <a:t> </a:t>
+            </a:r>
+            <a:r>
+              <a:rPr lang="en-US" sz="2100" dirty="0" err="1">
+                <a:solidFill>
+                  <a:srgbClr val="FFFFFF"/>
+                </a:solidFill>
+                <a:latin typeface="Courier Prime"/>
+                <a:ea typeface="Courier Prime"/>
+                <a:cs typeface="Courier Prime"/>
+                <a:sym typeface="Courier Prime"/>
+              </a:rPr>
+              <a:t>cosas</a:t>
+            </a:r>
+            <a:r>
+              <a:rPr lang="en-US" sz="2100" dirty="0">
+                <a:solidFill>
+                  <a:srgbClr val="FFFFFF"/>
+                </a:solidFill>
+                <a:latin typeface="Courier Prime"/>
+                <a:ea typeface="Courier Prime"/>
+                <a:cs typeface="Courier Prime"/>
+                <a:sym typeface="Courier Prime"/>
+              </a:rPr>
+              <a:t>.</a:t>
+            </a:r>
+          </a:p>
+        </p:txBody>
+      </p:sp>
+      <p:sp>
+        <p:nvSpPr>
+          <p:cNvPr id="20" name="TextBox 20"/>
+          <p:cNvSpPr txBox="1"/>
           <p:nvPr/>
         </p:nvSpPr>
         <p:spPr>
-          <a:xfrm rot="0">
-            <a:off x="3061642" y="7637763"/>
+          <a:xfrm>
+            <a:off x="11879477" y="6859247"/>
             <a:ext cx="4248745" cy="461772"/>
           </a:xfrm>
           <a:prstGeom prst="rect">
@@ -4850,7 +5719,7 @@
           </a:prstGeom>
         </p:spPr>
         <p:txBody>
-          <a:bodyPr anchor="t" rtlCol="false" tIns="0" lIns="0" bIns="0" rIns="0">
+          <a:bodyPr lIns="0" tIns="0" rIns="0" bIns="0" rtlCol="0" anchor="t">
             <a:spAutoFit/>
           </a:bodyPr>
           <a:lstStyle/>
@@ -4864,7 +5733,7 @@
               </a:spcBef>
             </a:pPr>
             <a:r>
-              <a:rPr lang="en-US" sz="3100">
+              <a:rPr lang="en-US" sz="3100" dirty="0">
                 <a:solidFill>
                   <a:srgbClr val="FD9E80"/>
                 </a:solidFill>
@@ -4873,28 +5742,49 @@
                 <a:cs typeface="Courier Prime"/>
                 <a:sym typeface="Courier Prime"/>
               </a:rPr>
-              <a:t>def guardar_imagen</a:t>
-            </a:r>
-          </a:p>
-        </p:txBody>
-      </p:sp>
-      <p:sp>
-        <p:nvSpPr>
-          <p:cNvPr name="TextBox 21" id="21"/>
-          <p:cNvSpPr txBox="true"/>
+              <a:t>def </a:t>
+            </a:r>
+            <a:r>
+              <a:rPr lang="en-US" sz="3100" dirty="0" err="1">
+                <a:solidFill>
+                  <a:srgbClr val="FD9E80"/>
+                </a:solidFill>
+                <a:latin typeface="Courier Prime"/>
+                <a:ea typeface="Courier Prime"/>
+                <a:cs typeface="Courier Prime"/>
+                <a:sym typeface="Courier Prime"/>
+              </a:rPr>
+              <a:t>guardar_imagen</a:t>
+            </a:r>
+            <a:endParaRPr lang="en-US" sz="3100" dirty="0">
+              <a:solidFill>
+                <a:srgbClr val="FD9E80"/>
+              </a:solidFill>
+              <a:latin typeface="Courier Prime"/>
+              <a:ea typeface="Courier Prime"/>
+              <a:cs typeface="Courier Prime"/>
+              <a:sym typeface="Courier Prime"/>
+            </a:endParaRPr>
+          </a:p>
+        </p:txBody>
+      </p:sp>
+      <p:sp>
+        <p:nvSpPr>
+          <p:cNvPr id="21" name="TextBox 21"/>
+          <p:cNvSpPr txBox="1"/>
           <p:nvPr/>
         </p:nvSpPr>
         <p:spPr>
-          <a:xfrm rot="0">
-            <a:off x="1450497" y="8037813"/>
-            <a:ext cx="7081242" cy="1482852"/>
+          <a:xfrm>
+            <a:off x="10862827" y="7750116"/>
+            <a:ext cx="6019801" cy="1850507"/>
           </a:xfrm>
           <a:prstGeom prst="rect">
             <a:avLst/>
           </a:prstGeom>
         </p:spPr>
         <p:txBody>
-          <a:bodyPr anchor="t" rtlCol="false" tIns="0" lIns="0" bIns="0" rIns="0">
+          <a:bodyPr wrap="square" lIns="0" tIns="0" rIns="0" bIns="0" rtlCol="0" anchor="t">
             <a:spAutoFit/>
           </a:bodyPr>
           <a:lstStyle/>
@@ -4908,37 +5798,661 @@
               </a:spcBef>
             </a:pPr>
             <a:r>
-              <a:rPr lang="en-US" sz="2100">
-                <a:solidFill>
-                  <a:srgbClr val="FFFFFF"/>
-                </a:solidFill>
-                <a:latin typeface="Courier Prime"/>
-                <a:ea typeface="Courier Prime"/>
-                <a:cs typeface="Courier Prime"/>
-                <a:sym typeface="Courier Prime"/>
-              </a:rPr>
-              <a:t>Guarda la imagen previamente editada por el usuario en el PC como un archivo real y como el programa la detecta como una matriz esta función la transforma esos números para que el PC lo entienda como una foto real.</a:t>
-            </a:r>
-          </a:p>
-        </p:txBody>
-      </p:sp>
-      <p:sp>
-        <p:nvSpPr>
-          <p:cNvPr name="TextBox 22" id="22"/>
-          <p:cNvSpPr txBox="true"/>
+              <a:rPr lang="en-US" sz="2100" dirty="0">
+                <a:solidFill>
+                  <a:srgbClr val="FFFFFF"/>
+                </a:solidFill>
+                <a:latin typeface="Courier Prime"/>
+                <a:ea typeface="Courier Prime"/>
+                <a:cs typeface="Courier Prime"/>
+                <a:sym typeface="Courier Prime"/>
+              </a:rPr>
+              <a:t>Guarda la imagen </a:t>
+            </a:r>
+            <a:r>
+              <a:rPr lang="en-US" sz="2100" dirty="0" err="1">
+                <a:solidFill>
+                  <a:srgbClr val="FFFFFF"/>
+                </a:solidFill>
+                <a:latin typeface="Courier Prime"/>
+                <a:ea typeface="Courier Prime"/>
+                <a:cs typeface="Courier Prime"/>
+                <a:sym typeface="Courier Prime"/>
+              </a:rPr>
+              <a:t>previamente</a:t>
+            </a:r>
+            <a:r>
+              <a:rPr lang="en-US" sz="2100" dirty="0">
+                <a:solidFill>
+                  <a:srgbClr val="FFFFFF"/>
+                </a:solidFill>
+                <a:latin typeface="Courier Prime"/>
+                <a:ea typeface="Courier Prime"/>
+                <a:cs typeface="Courier Prime"/>
+                <a:sym typeface="Courier Prime"/>
+              </a:rPr>
+              <a:t> </a:t>
+            </a:r>
+            <a:r>
+              <a:rPr lang="en-US" sz="2100" dirty="0" err="1">
+                <a:solidFill>
+                  <a:srgbClr val="FFFFFF"/>
+                </a:solidFill>
+                <a:latin typeface="Courier Prime"/>
+                <a:ea typeface="Courier Prime"/>
+                <a:cs typeface="Courier Prime"/>
+                <a:sym typeface="Courier Prime"/>
+              </a:rPr>
+              <a:t>editada</a:t>
+            </a:r>
+            <a:r>
+              <a:rPr lang="en-US" sz="2100" dirty="0">
+                <a:solidFill>
+                  <a:srgbClr val="FFFFFF"/>
+                </a:solidFill>
+                <a:latin typeface="Courier Prime"/>
+                <a:ea typeface="Courier Prime"/>
+                <a:cs typeface="Courier Prime"/>
+                <a:sym typeface="Courier Prime"/>
+              </a:rPr>
+              <a:t> </a:t>
+            </a:r>
+            <a:r>
+              <a:rPr lang="en-US" sz="2100" dirty="0" err="1">
+                <a:solidFill>
+                  <a:srgbClr val="FFFFFF"/>
+                </a:solidFill>
+                <a:latin typeface="Courier Prime"/>
+                <a:ea typeface="Courier Prime"/>
+                <a:cs typeface="Courier Prime"/>
+                <a:sym typeface="Courier Prime"/>
+              </a:rPr>
+              <a:t>por</a:t>
+            </a:r>
+            <a:r>
+              <a:rPr lang="en-US" sz="2100" dirty="0">
+                <a:solidFill>
+                  <a:srgbClr val="FFFFFF"/>
+                </a:solidFill>
+                <a:latin typeface="Courier Prime"/>
+                <a:ea typeface="Courier Prime"/>
+                <a:cs typeface="Courier Prime"/>
+                <a:sym typeface="Courier Prime"/>
+              </a:rPr>
+              <a:t> </a:t>
+            </a:r>
+            <a:r>
+              <a:rPr lang="en-US" sz="2100" dirty="0" err="1">
+                <a:solidFill>
+                  <a:srgbClr val="FFFFFF"/>
+                </a:solidFill>
+                <a:latin typeface="Courier Prime"/>
+                <a:ea typeface="Courier Prime"/>
+                <a:cs typeface="Courier Prime"/>
+                <a:sym typeface="Courier Prime"/>
+              </a:rPr>
+              <a:t>el</a:t>
+            </a:r>
+            <a:r>
+              <a:rPr lang="en-US" sz="2100" dirty="0">
+                <a:solidFill>
+                  <a:srgbClr val="FFFFFF"/>
+                </a:solidFill>
+                <a:latin typeface="Courier Prime"/>
+                <a:ea typeface="Courier Prime"/>
+                <a:cs typeface="Courier Prime"/>
+                <a:sym typeface="Courier Prime"/>
+              </a:rPr>
+              <a:t> </a:t>
+            </a:r>
+            <a:r>
+              <a:rPr lang="en-US" sz="2100" dirty="0" err="1">
+                <a:solidFill>
+                  <a:srgbClr val="FFFFFF"/>
+                </a:solidFill>
+                <a:latin typeface="Courier Prime"/>
+                <a:ea typeface="Courier Prime"/>
+                <a:cs typeface="Courier Prime"/>
+                <a:sym typeface="Courier Prime"/>
+              </a:rPr>
+              <a:t>usuario</a:t>
+            </a:r>
+            <a:r>
+              <a:rPr lang="en-US" sz="2100" dirty="0">
+                <a:solidFill>
+                  <a:srgbClr val="FFFFFF"/>
+                </a:solidFill>
+                <a:latin typeface="Courier Prime"/>
+                <a:ea typeface="Courier Prime"/>
+                <a:cs typeface="Courier Prime"/>
+                <a:sym typeface="Courier Prime"/>
+              </a:rPr>
+              <a:t> </a:t>
+            </a:r>
+            <a:r>
+              <a:rPr lang="en-US" sz="2100" dirty="0" err="1">
+                <a:solidFill>
+                  <a:srgbClr val="FFFFFF"/>
+                </a:solidFill>
+                <a:latin typeface="Courier Prime"/>
+                <a:ea typeface="Courier Prime"/>
+                <a:cs typeface="Courier Prime"/>
+                <a:sym typeface="Courier Prime"/>
+              </a:rPr>
+              <a:t>en</a:t>
+            </a:r>
+            <a:r>
+              <a:rPr lang="en-US" sz="2100" dirty="0">
+                <a:solidFill>
+                  <a:srgbClr val="FFFFFF"/>
+                </a:solidFill>
+                <a:latin typeface="Courier Prime"/>
+                <a:ea typeface="Courier Prime"/>
+                <a:cs typeface="Courier Prime"/>
+                <a:sym typeface="Courier Prime"/>
+              </a:rPr>
+              <a:t> </a:t>
+            </a:r>
+            <a:r>
+              <a:rPr lang="en-US" sz="2100" dirty="0" err="1">
+                <a:solidFill>
+                  <a:srgbClr val="FFFFFF"/>
+                </a:solidFill>
+                <a:latin typeface="Courier Prime"/>
+                <a:ea typeface="Courier Prime"/>
+                <a:cs typeface="Courier Prime"/>
+                <a:sym typeface="Courier Prime"/>
+              </a:rPr>
+              <a:t>el</a:t>
+            </a:r>
+            <a:r>
+              <a:rPr lang="en-US" sz="2100" dirty="0">
+                <a:solidFill>
+                  <a:srgbClr val="FFFFFF"/>
+                </a:solidFill>
+                <a:latin typeface="Courier Prime"/>
+                <a:ea typeface="Courier Prime"/>
+                <a:cs typeface="Courier Prime"/>
+                <a:sym typeface="Courier Prime"/>
+              </a:rPr>
+              <a:t> PC </a:t>
+            </a:r>
+            <a:r>
+              <a:rPr lang="en-US" sz="2100" dirty="0" err="1">
+                <a:solidFill>
+                  <a:srgbClr val="FFFFFF"/>
+                </a:solidFill>
+                <a:latin typeface="Courier Prime"/>
+                <a:ea typeface="Courier Prime"/>
+                <a:cs typeface="Courier Prime"/>
+                <a:sym typeface="Courier Prime"/>
+              </a:rPr>
+              <a:t>como</a:t>
+            </a:r>
+            <a:r>
+              <a:rPr lang="en-US" sz="2100" dirty="0">
+                <a:solidFill>
+                  <a:srgbClr val="FFFFFF"/>
+                </a:solidFill>
+                <a:latin typeface="Courier Prime"/>
+                <a:ea typeface="Courier Prime"/>
+                <a:cs typeface="Courier Prime"/>
+                <a:sym typeface="Courier Prime"/>
+              </a:rPr>
+              <a:t> un </a:t>
+            </a:r>
+            <a:r>
+              <a:rPr lang="en-US" sz="2100" dirty="0" err="1">
+                <a:solidFill>
+                  <a:srgbClr val="FFFFFF"/>
+                </a:solidFill>
+                <a:latin typeface="Courier Prime"/>
+                <a:ea typeface="Courier Prime"/>
+                <a:cs typeface="Courier Prime"/>
+                <a:sym typeface="Courier Prime"/>
+              </a:rPr>
+              <a:t>archivo</a:t>
+            </a:r>
+            <a:r>
+              <a:rPr lang="en-US" sz="2100" dirty="0">
+                <a:solidFill>
+                  <a:srgbClr val="FFFFFF"/>
+                </a:solidFill>
+                <a:latin typeface="Courier Prime"/>
+                <a:ea typeface="Courier Prime"/>
+                <a:cs typeface="Courier Prime"/>
+                <a:sym typeface="Courier Prime"/>
+              </a:rPr>
+              <a:t> real y </a:t>
+            </a:r>
+            <a:r>
+              <a:rPr lang="en-US" sz="2100" dirty="0" err="1">
+                <a:solidFill>
+                  <a:srgbClr val="FFFFFF"/>
+                </a:solidFill>
+                <a:latin typeface="Courier Prime"/>
+                <a:ea typeface="Courier Prime"/>
+                <a:cs typeface="Courier Prime"/>
+                <a:sym typeface="Courier Prime"/>
+              </a:rPr>
+              <a:t>como</a:t>
+            </a:r>
+            <a:r>
+              <a:rPr lang="en-US" sz="2100" dirty="0">
+                <a:solidFill>
+                  <a:srgbClr val="FFFFFF"/>
+                </a:solidFill>
+                <a:latin typeface="Courier Prime"/>
+                <a:ea typeface="Courier Prime"/>
+                <a:cs typeface="Courier Prime"/>
+                <a:sym typeface="Courier Prime"/>
+              </a:rPr>
+              <a:t> </a:t>
+            </a:r>
+            <a:r>
+              <a:rPr lang="en-US" sz="2100" dirty="0" err="1">
+                <a:solidFill>
+                  <a:srgbClr val="FFFFFF"/>
+                </a:solidFill>
+                <a:latin typeface="Courier Prime"/>
+                <a:ea typeface="Courier Prime"/>
+                <a:cs typeface="Courier Prime"/>
+                <a:sym typeface="Courier Prime"/>
+              </a:rPr>
+              <a:t>el</a:t>
+            </a:r>
+            <a:r>
+              <a:rPr lang="en-US" sz="2100" dirty="0">
+                <a:solidFill>
+                  <a:srgbClr val="FFFFFF"/>
+                </a:solidFill>
+                <a:latin typeface="Courier Prime"/>
+                <a:ea typeface="Courier Prime"/>
+                <a:cs typeface="Courier Prime"/>
+                <a:sym typeface="Courier Prime"/>
+              </a:rPr>
+              <a:t> </a:t>
+            </a:r>
+            <a:r>
+              <a:rPr lang="en-US" sz="2100" dirty="0" err="1">
+                <a:solidFill>
+                  <a:srgbClr val="FFFFFF"/>
+                </a:solidFill>
+                <a:latin typeface="Courier Prime"/>
+                <a:ea typeface="Courier Prime"/>
+                <a:cs typeface="Courier Prime"/>
+                <a:sym typeface="Courier Prime"/>
+              </a:rPr>
+              <a:t>programa</a:t>
+            </a:r>
+            <a:r>
+              <a:rPr lang="en-US" sz="2100" dirty="0">
+                <a:solidFill>
+                  <a:srgbClr val="FFFFFF"/>
+                </a:solidFill>
+                <a:latin typeface="Courier Prime"/>
+                <a:ea typeface="Courier Prime"/>
+                <a:cs typeface="Courier Prime"/>
+                <a:sym typeface="Courier Prime"/>
+              </a:rPr>
+              <a:t> la </a:t>
+            </a:r>
+            <a:r>
+              <a:rPr lang="en-US" sz="2100" dirty="0" err="1">
+                <a:solidFill>
+                  <a:srgbClr val="FFFFFF"/>
+                </a:solidFill>
+                <a:latin typeface="Courier Prime"/>
+                <a:ea typeface="Courier Prime"/>
+                <a:cs typeface="Courier Prime"/>
+                <a:sym typeface="Courier Prime"/>
+              </a:rPr>
+              <a:t>detecta</a:t>
+            </a:r>
+            <a:r>
+              <a:rPr lang="en-US" sz="2100" dirty="0">
+                <a:solidFill>
+                  <a:srgbClr val="FFFFFF"/>
+                </a:solidFill>
+                <a:latin typeface="Courier Prime"/>
+                <a:ea typeface="Courier Prime"/>
+                <a:cs typeface="Courier Prime"/>
+                <a:sym typeface="Courier Prime"/>
+              </a:rPr>
+              <a:t> </a:t>
+            </a:r>
+            <a:r>
+              <a:rPr lang="en-US" sz="2100" dirty="0" err="1">
+                <a:solidFill>
+                  <a:srgbClr val="FFFFFF"/>
+                </a:solidFill>
+                <a:latin typeface="Courier Prime"/>
+                <a:ea typeface="Courier Prime"/>
+                <a:cs typeface="Courier Prime"/>
+                <a:sym typeface="Courier Prime"/>
+              </a:rPr>
+              <a:t>como</a:t>
+            </a:r>
+            <a:r>
+              <a:rPr lang="en-US" sz="2100" dirty="0">
+                <a:solidFill>
+                  <a:srgbClr val="FFFFFF"/>
+                </a:solidFill>
+                <a:latin typeface="Courier Prime"/>
+                <a:ea typeface="Courier Prime"/>
+                <a:cs typeface="Courier Prime"/>
+                <a:sym typeface="Courier Prime"/>
+              </a:rPr>
+              <a:t> </a:t>
+            </a:r>
+            <a:r>
+              <a:rPr lang="en-US" sz="2100" dirty="0" err="1">
+                <a:solidFill>
+                  <a:srgbClr val="FFFFFF"/>
+                </a:solidFill>
+                <a:latin typeface="Courier Prime"/>
+                <a:ea typeface="Courier Prime"/>
+                <a:cs typeface="Courier Prime"/>
+                <a:sym typeface="Courier Prime"/>
+              </a:rPr>
+              <a:t>una</a:t>
+            </a:r>
+            <a:r>
+              <a:rPr lang="en-US" sz="2100" dirty="0">
+                <a:solidFill>
+                  <a:srgbClr val="FFFFFF"/>
+                </a:solidFill>
+                <a:latin typeface="Courier Prime"/>
+                <a:ea typeface="Courier Prime"/>
+                <a:cs typeface="Courier Prime"/>
+                <a:sym typeface="Courier Prime"/>
+              </a:rPr>
+              <a:t> </a:t>
+            </a:r>
+            <a:r>
+              <a:rPr lang="en-US" sz="2100" dirty="0" err="1">
+                <a:solidFill>
+                  <a:srgbClr val="FFFFFF"/>
+                </a:solidFill>
+                <a:latin typeface="Courier Prime"/>
+                <a:ea typeface="Courier Prime"/>
+                <a:cs typeface="Courier Prime"/>
+                <a:sym typeface="Courier Prime"/>
+              </a:rPr>
+              <a:t>matriz</a:t>
+            </a:r>
+            <a:r>
+              <a:rPr lang="en-US" sz="2100" dirty="0">
+                <a:solidFill>
+                  <a:srgbClr val="FFFFFF"/>
+                </a:solidFill>
+                <a:latin typeface="Courier Prime"/>
+                <a:ea typeface="Courier Prime"/>
+                <a:cs typeface="Courier Prime"/>
+                <a:sym typeface="Courier Prime"/>
+              </a:rPr>
+              <a:t> </a:t>
+            </a:r>
+            <a:r>
+              <a:rPr lang="en-US" sz="2100" dirty="0" err="1">
+                <a:solidFill>
+                  <a:srgbClr val="FFFFFF"/>
+                </a:solidFill>
+                <a:latin typeface="Courier Prime"/>
+                <a:ea typeface="Courier Prime"/>
+                <a:cs typeface="Courier Prime"/>
+                <a:sym typeface="Courier Prime"/>
+              </a:rPr>
+              <a:t>esta</a:t>
+            </a:r>
+            <a:r>
+              <a:rPr lang="en-US" sz="2100" dirty="0">
+                <a:solidFill>
+                  <a:srgbClr val="FFFFFF"/>
+                </a:solidFill>
+                <a:latin typeface="Courier Prime"/>
+                <a:ea typeface="Courier Prime"/>
+                <a:cs typeface="Courier Prime"/>
+                <a:sym typeface="Courier Prime"/>
+              </a:rPr>
+              <a:t> </a:t>
+            </a:r>
+            <a:r>
+              <a:rPr lang="en-US" sz="2100" dirty="0" err="1">
+                <a:solidFill>
+                  <a:srgbClr val="FFFFFF"/>
+                </a:solidFill>
+                <a:latin typeface="Courier Prime"/>
+                <a:ea typeface="Courier Prime"/>
+                <a:cs typeface="Courier Prime"/>
+                <a:sym typeface="Courier Prime"/>
+              </a:rPr>
+              <a:t>función</a:t>
+            </a:r>
+            <a:r>
+              <a:rPr lang="en-US" sz="2100" dirty="0">
+                <a:solidFill>
+                  <a:srgbClr val="FFFFFF"/>
+                </a:solidFill>
+                <a:latin typeface="Courier Prime"/>
+                <a:ea typeface="Courier Prime"/>
+                <a:cs typeface="Courier Prime"/>
+                <a:sym typeface="Courier Prime"/>
+              </a:rPr>
+              <a:t> la </a:t>
+            </a:r>
+            <a:r>
+              <a:rPr lang="en-US" sz="2100" dirty="0" err="1">
+                <a:solidFill>
+                  <a:srgbClr val="FFFFFF"/>
+                </a:solidFill>
+                <a:latin typeface="Courier Prime"/>
+                <a:ea typeface="Courier Prime"/>
+                <a:cs typeface="Courier Prime"/>
+                <a:sym typeface="Courier Prime"/>
+              </a:rPr>
+              <a:t>transforma</a:t>
+            </a:r>
+            <a:r>
+              <a:rPr lang="en-US" sz="2100" dirty="0">
+                <a:solidFill>
+                  <a:srgbClr val="FFFFFF"/>
+                </a:solidFill>
+                <a:latin typeface="Courier Prime"/>
+                <a:ea typeface="Courier Prime"/>
+                <a:cs typeface="Courier Prime"/>
+                <a:sym typeface="Courier Prime"/>
+              </a:rPr>
+              <a:t> </a:t>
+            </a:r>
+            <a:r>
+              <a:rPr lang="en-US" sz="2100" dirty="0" err="1">
+                <a:solidFill>
+                  <a:srgbClr val="FFFFFF"/>
+                </a:solidFill>
+                <a:latin typeface="Courier Prime"/>
+                <a:ea typeface="Courier Prime"/>
+                <a:cs typeface="Courier Prime"/>
+                <a:sym typeface="Courier Prime"/>
+              </a:rPr>
+              <a:t>esos</a:t>
+            </a:r>
+            <a:r>
+              <a:rPr lang="en-US" sz="2100" dirty="0">
+                <a:solidFill>
+                  <a:srgbClr val="FFFFFF"/>
+                </a:solidFill>
+                <a:latin typeface="Courier Prime"/>
+                <a:ea typeface="Courier Prime"/>
+                <a:cs typeface="Courier Prime"/>
+                <a:sym typeface="Courier Prime"/>
+              </a:rPr>
+              <a:t> </a:t>
+            </a:r>
+            <a:r>
+              <a:rPr lang="en-US" sz="2100" dirty="0" err="1">
+                <a:solidFill>
+                  <a:srgbClr val="FFFFFF"/>
+                </a:solidFill>
+                <a:latin typeface="Courier Prime"/>
+                <a:ea typeface="Courier Prime"/>
+                <a:cs typeface="Courier Prime"/>
+                <a:sym typeface="Courier Prime"/>
+              </a:rPr>
+              <a:t>números</a:t>
+            </a:r>
+            <a:r>
+              <a:rPr lang="en-US" sz="2100" dirty="0">
+                <a:solidFill>
+                  <a:srgbClr val="FFFFFF"/>
+                </a:solidFill>
+                <a:latin typeface="Courier Prime"/>
+                <a:ea typeface="Courier Prime"/>
+                <a:cs typeface="Courier Prime"/>
+                <a:sym typeface="Courier Prime"/>
+              </a:rPr>
+              <a:t> para que </a:t>
+            </a:r>
+            <a:r>
+              <a:rPr lang="en-US" sz="2100" dirty="0" err="1">
+                <a:solidFill>
+                  <a:srgbClr val="FFFFFF"/>
+                </a:solidFill>
+                <a:latin typeface="Courier Prime"/>
+                <a:ea typeface="Courier Prime"/>
+                <a:cs typeface="Courier Prime"/>
+                <a:sym typeface="Courier Prime"/>
+              </a:rPr>
+              <a:t>el</a:t>
+            </a:r>
+            <a:r>
+              <a:rPr lang="en-US" sz="2100" dirty="0">
+                <a:solidFill>
+                  <a:srgbClr val="FFFFFF"/>
+                </a:solidFill>
+                <a:latin typeface="Courier Prime"/>
+                <a:ea typeface="Courier Prime"/>
+                <a:cs typeface="Courier Prime"/>
+                <a:sym typeface="Courier Prime"/>
+              </a:rPr>
+              <a:t> PC lo </a:t>
+            </a:r>
+            <a:r>
+              <a:rPr lang="en-US" sz="2100" dirty="0" err="1">
+                <a:solidFill>
+                  <a:srgbClr val="FFFFFF"/>
+                </a:solidFill>
+                <a:latin typeface="Courier Prime"/>
+                <a:ea typeface="Courier Prime"/>
+                <a:cs typeface="Courier Prime"/>
+                <a:sym typeface="Courier Prime"/>
+              </a:rPr>
+              <a:t>entienda</a:t>
+            </a:r>
+            <a:r>
+              <a:rPr lang="en-US" sz="2100" dirty="0">
+                <a:solidFill>
+                  <a:srgbClr val="FFFFFF"/>
+                </a:solidFill>
+                <a:latin typeface="Courier Prime"/>
+                <a:ea typeface="Courier Prime"/>
+                <a:cs typeface="Courier Prime"/>
+                <a:sym typeface="Courier Prime"/>
+              </a:rPr>
+              <a:t> </a:t>
+            </a:r>
+            <a:r>
+              <a:rPr lang="en-US" sz="2100" dirty="0" err="1">
+                <a:solidFill>
+                  <a:srgbClr val="FFFFFF"/>
+                </a:solidFill>
+                <a:latin typeface="Courier Prime"/>
+                <a:ea typeface="Courier Prime"/>
+                <a:cs typeface="Courier Prime"/>
+                <a:sym typeface="Courier Prime"/>
+              </a:rPr>
+              <a:t>como</a:t>
+            </a:r>
+            <a:r>
+              <a:rPr lang="en-US" sz="2100" dirty="0">
+                <a:solidFill>
+                  <a:srgbClr val="FFFFFF"/>
+                </a:solidFill>
+                <a:latin typeface="Courier Prime"/>
+                <a:ea typeface="Courier Prime"/>
+                <a:cs typeface="Courier Prime"/>
+                <a:sym typeface="Courier Prime"/>
+              </a:rPr>
+              <a:t> </a:t>
+            </a:r>
+            <a:r>
+              <a:rPr lang="en-US" sz="2100" dirty="0" err="1">
+                <a:solidFill>
+                  <a:srgbClr val="FFFFFF"/>
+                </a:solidFill>
+                <a:latin typeface="Courier Prime"/>
+                <a:ea typeface="Courier Prime"/>
+                <a:cs typeface="Courier Prime"/>
+                <a:sym typeface="Courier Prime"/>
+              </a:rPr>
+              <a:t>una</a:t>
+            </a:r>
+            <a:r>
+              <a:rPr lang="en-US" sz="2100" dirty="0">
+                <a:solidFill>
+                  <a:srgbClr val="FFFFFF"/>
+                </a:solidFill>
+                <a:latin typeface="Courier Prime"/>
+                <a:ea typeface="Courier Prime"/>
+                <a:cs typeface="Courier Prime"/>
+                <a:sym typeface="Courier Prime"/>
+              </a:rPr>
+              <a:t> </a:t>
+            </a:r>
+            <a:r>
+              <a:rPr lang="en-US" sz="2100" dirty="0" err="1">
+                <a:solidFill>
+                  <a:srgbClr val="FFFFFF"/>
+                </a:solidFill>
+                <a:latin typeface="Courier Prime"/>
+                <a:ea typeface="Courier Prime"/>
+                <a:cs typeface="Courier Prime"/>
+                <a:sym typeface="Courier Prime"/>
+              </a:rPr>
+              <a:t>foto</a:t>
+            </a:r>
+            <a:r>
+              <a:rPr lang="en-US" sz="2100" dirty="0">
+                <a:solidFill>
+                  <a:srgbClr val="FFFFFF"/>
+                </a:solidFill>
+                <a:latin typeface="Courier Prime"/>
+                <a:ea typeface="Courier Prime"/>
+                <a:cs typeface="Courier Prime"/>
+                <a:sym typeface="Courier Prime"/>
+              </a:rPr>
+              <a:t> real.</a:t>
+            </a:r>
+          </a:p>
+        </p:txBody>
+      </p:sp>
+      <p:sp>
+        <p:nvSpPr>
+          <p:cNvPr id="22" name="TextBox 22"/>
+          <p:cNvSpPr txBox="1"/>
           <p:nvPr/>
         </p:nvSpPr>
         <p:spPr>
-          <a:xfrm rot="0">
-            <a:off x="11637451" y="5153025"/>
-            <a:ext cx="5480258" cy="2296711"/>
+          <a:xfrm>
+            <a:off x="11112089" y="3862174"/>
+            <a:ext cx="5480258" cy="1538883"/>
           </a:xfrm>
           <a:prstGeom prst="rect">
             <a:avLst/>
           </a:prstGeom>
         </p:spPr>
         <p:txBody>
-          <a:bodyPr anchor="t" rtlCol="false" tIns="0" lIns="0" bIns="0" rIns="0">
+          <a:bodyPr lIns="0" tIns="0" rIns="0" bIns="0" rtlCol="0" anchor="t">
             <a:spAutoFit/>
           </a:bodyPr>
           <a:lstStyle/>
@@ -4952,60 +6466,337 @@
               </a:spcBef>
             </a:pPr>
             <a:r>
-              <a:rPr lang="en-US" sz="2655">
-                <a:solidFill>
-                  <a:srgbClr val="FFFFFF"/>
-                </a:solidFill>
-                <a:latin typeface="Courier Prime"/>
-                <a:ea typeface="Courier Prime"/>
-                <a:cs typeface="Courier Prime"/>
-                <a:sym typeface="Courier Prime"/>
-              </a:rPr>
-              <a:t>Toma la imagen original, la re-dimensiona, luego detecta el color de su fondo y este lo reemplaza por uno de los fondos para elegir.</a:t>
-            </a:r>
-          </a:p>
-        </p:txBody>
-      </p:sp>
-      <p:sp>
-        <p:nvSpPr>
-          <p:cNvPr name="TextBox 23" id="23"/>
-          <p:cNvSpPr txBox="true"/>
+              <a:rPr lang="en-US" sz="2100" dirty="0">
+                <a:solidFill>
+                  <a:srgbClr val="FFFFFF"/>
+                </a:solidFill>
+                <a:latin typeface="Courier Prime"/>
+                <a:ea typeface="Courier Prime"/>
+                <a:cs typeface="Courier Prime"/>
+                <a:sym typeface="Courier Prime"/>
+              </a:rPr>
+              <a:t>Toma la imagen original, la re-</a:t>
+            </a:r>
+            <a:r>
+              <a:rPr lang="en-US" sz="2100" dirty="0" err="1">
+                <a:solidFill>
+                  <a:srgbClr val="FFFFFF"/>
+                </a:solidFill>
+                <a:latin typeface="Courier Prime"/>
+                <a:ea typeface="Courier Prime"/>
+                <a:cs typeface="Courier Prime"/>
+                <a:sym typeface="Courier Prime"/>
+              </a:rPr>
+              <a:t>dimensiona</a:t>
+            </a:r>
+            <a:r>
+              <a:rPr lang="en-US" sz="2100" dirty="0">
+                <a:solidFill>
+                  <a:srgbClr val="FFFFFF"/>
+                </a:solidFill>
+                <a:latin typeface="Courier Prime"/>
+                <a:ea typeface="Courier Prime"/>
+                <a:cs typeface="Courier Prime"/>
+                <a:sym typeface="Courier Prime"/>
+              </a:rPr>
+              <a:t>, luego </a:t>
+            </a:r>
+            <a:r>
+              <a:rPr lang="en-US" sz="2100" dirty="0" err="1">
+                <a:solidFill>
+                  <a:srgbClr val="FFFFFF"/>
+                </a:solidFill>
+                <a:latin typeface="Courier Prime"/>
+                <a:ea typeface="Courier Prime"/>
+                <a:cs typeface="Courier Prime"/>
+                <a:sym typeface="Courier Prime"/>
+              </a:rPr>
+              <a:t>detecta</a:t>
+            </a:r>
+            <a:r>
+              <a:rPr lang="en-US" sz="2100" dirty="0">
+                <a:solidFill>
+                  <a:srgbClr val="FFFFFF"/>
+                </a:solidFill>
+                <a:latin typeface="Courier Prime"/>
+                <a:ea typeface="Courier Prime"/>
+                <a:cs typeface="Courier Prime"/>
+                <a:sym typeface="Courier Prime"/>
+              </a:rPr>
+              <a:t> </a:t>
+            </a:r>
+            <a:r>
+              <a:rPr lang="en-US" sz="2100" dirty="0" err="1">
+                <a:solidFill>
+                  <a:srgbClr val="FFFFFF"/>
+                </a:solidFill>
+                <a:latin typeface="Courier Prime"/>
+                <a:ea typeface="Courier Prime"/>
+                <a:cs typeface="Courier Prime"/>
+                <a:sym typeface="Courier Prime"/>
+              </a:rPr>
+              <a:t>el</a:t>
+            </a:r>
+            <a:r>
+              <a:rPr lang="en-US" sz="2100" dirty="0">
+                <a:solidFill>
+                  <a:srgbClr val="FFFFFF"/>
+                </a:solidFill>
+                <a:latin typeface="Courier Prime"/>
+                <a:ea typeface="Courier Prime"/>
+                <a:cs typeface="Courier Prime"/>
+                <a:sym typeface="Courier Prime"/>
+              </a:rPr>
+              <a:t> color de </a:t>
+            </a:r>
+            <a:r>
+              <a:rPr lang="en-US" sz="2100" dirty="0" err="1">
+                <a:solidFill>
+                  <a:srgbClr val="FFFFFF"/>
+                </a:solidFill>
+                <a:latin typeface="Courier Prime"/>
+                <a:ea typeface="Courier Prime"/>
+                <a:cs typeface="Courier Prime"/>
+                <a:sym typeface="Courier Prime"/>
+              </a:rPr>
+              <a:t>su</a:t>
+            </a:r>
+            <a:r>
+              <a:rPr lang="en-US" sz="2100" dirty="0">
+                <a:solidFill>
+                  <a:srgbClr val="FFFFFF"/>
+                </a:solidFill>
+                <a:latin typeface="Courier Prime"/>
+                <a:ea typeface="Courier Prime"/>
+                <a:cs typeface="Courier Prime"/>
+                <a:sym typeface="Courier Prime"/>
+              </a:rPr>
+              <a:t> </a:t>
+            </a:r>
+            <a:r>
+              <a:rPr lang="en-US" sz="2100" dirty="0" err="1">
+                <a:solidFill>
+                  <a:srgbClr val="FFFFFF"/>
+                </a:solidFill>
+                <a:latin typeface="Courier Prime"/>
+                <a:ea typeface="Courier Prime"/>
+                <a:cs typeface="Courier Prime"/>
+                <a:sym typeface="Courier Prime"/>
+              </a:rPr>
+              <a:t>fondo</a:t>
+            </a:r>
+            <a:r>
+              <a:rPr lang="en-US" sz="2100" dirty="0">
+                <a:solidFill>
+                  <a:srgbClr val="FFFFFF"/>
+                </a:solidFill>
+                <a:latin typeface="Courier Prime"/>
+                <a:ea typeface="Courier Prime"/>
+                <a:cs typeface="Courier Prime"/>
+                <a:sym typeface="Courier Prime"/>
+              </a:rPr>
+              <a:t> y </a:t>
+            </a:r>
+            <a:r>
+              <a:rPr lang="en-US" sz="2100" dirty="0" err="1">
+                <a:solidFill>
+                  <a:srgbClr val="FFFFFF"/>
+                </a:solidFill>
+                <a:latin typeface="Courier Prime"/>
+                <a:ea typeface="Courier Prime"/>
+                <a:cs typeface="Courier Prime"/>
+                <a:sym typeface="Courier Prime"/>
+              </a:rPr>
+              <a:t>este</a:t>
+            </a:r>
+            <a:r>
+              <a:rPr lang="en-US" sz="2100" dirty="0">
+                <a:solidFill>
+                  <a:srgbClr val="FFFFFF"/>
+                </a:solidFill>
+                <a:latin typeface="Courier Prime"/>
+                <a:ea typeface="Courier Prime"/>
+                <a:cs typeface="Courier Prime"/>
+                <a:sym typeface="Courier Prime"/>
+              </a:rPr>
+              <a:t> lo </a:t>
+            </a:r>
+            <a:r>
+              <a:rPr lang="en-US" sz="2100" dirty="0" err="1">
+                <a:solidFill>
+                  <a:srgbClr val="FFFFFF"/>
+                </a:solidFill>
+                <a:latin typeface="Courier Prime"/>
+                <a:ea typeface="Courier Prime"/>
+                <a:cs typeface="Courier Prime"/>
+                <a:sym typeface="Courier Prime"/>
+              </a:rPr>
+              <a:t>reemplaza</a:t>
+            </a:r>
+            <a:r>
+              <a:rPr lang="en-US" sz="2100" dirty="0">
+                <a:solidFill>
+                  <a:srgbClr val="FFFFFF"/>
+                </a:solidFill>
+                <a:latin typeface="Courier Prime"/>
+                <a:ea typeface="Courier Prime"/>
+                <a:cs typeface="Courier Prime"/>
+                <a:sym typeface="Courier Prime"/>
+              </a:rPr>
+              <a:t> </a:t>
+            </a:r>
+            <a:r>
+              <a:rPr lang="en-US" sz="2100" dirty="0" err="1">
+                <a:solidFill>
+                  <a:srgbClr val="FFFFFF"/>
+                </a:solidFill>
+                <a:latin typeface="Courier Prime"/>
+                <a:ea typeface="Courier Prime"/>
+                <a:cs typeface="Courier Prime"/>
+                <a:sym typeface="Courier Prime"/>
+              </a:rPr>
+              <a:t>por</a:t>
+            </a:r>
+            <a:r>
+              <a:rPr lang="en-US" sz="2100" dirty="0">
+                <a:solidFill>
+                  <a:srgbClr val="FFFFFF"/>
+                </a:solidFill>
+                <a:latin typeface="Courier Prime"/>
+                <a:ea typeface="Courier Prime"/>
+                <a:cs typeface="Courier Prime"/>
+                <a:sym typeface="Courier Prime"/>
+              </a:rPr>
+              <a:t> uno de </a:t>
+            </a:r>
+            <a:r>
+              <a:rPr lang="en-US" sz="2100" dirty="0" err="1">
+                <a:solidFill>
+                  <a:srgbClr val="FFFFFF"/>
+                </a:solidFill>
+                <a:latin typeface="Courier Prime"/>
+                <a:ea typeface="Courier Prime"/>
+                <a:cs typeface="Courier Prime"/>
+                <a:sym typeface="Courier Prime"/>
+              </a:rPr>
+              <a:t>los</a:t>
+            </a:r>
+            <a:r>
+              <a:rPr lang="en-US" sz="2100" dirty="0">
+                <a:solidFill>
+                  <a:srgbClr val="FFFFFF"/>
+                </a:solidFill>
+                <a:latin typeface="Courier Prime"/>
+                <a:ea typeface="Courier Prime"/>
+                <a:cs typeface="Courier Prime"/>
+                <a:sym typeface="Courier Prime"/>
+              </a:rPr>
+              <a:t> </a:t>
+            </a:r>
+            <a:r>
+              <a:rPr lang="en-US" sz="2100" dirty="0" err="1">
+                <a:solidFill>
+                  <a:srgbClr val="FFFFFF"/>
+                </a:solidFill>
+                <a:latin typeface="Courier Prime"/>
+                <a:ea typeface="Courier Prime"/>
+                <a:cs typeface="Courier Prime"/>
+                <a:sym typeface="Courier Prime"/>
+              </a:rPr>
+              <a:t>fondos</a:t>
+            </a:r>
+            <a:r>
+              <a:rPr lang="en-US" sz="2100" dirty="0">
+                <a:solidFill>
+                  <a:srgbClr val="FFFFFF"/>
+                </a:solidFill>
+                <a:latin typeface="Courier Prime"/>
+                <a:ea typeface="Courier Prime"/>
+                <a:cs typeface="Courier Prime"/>
+                <a:sym typeface="Courier Prime"/>
+              </a:rPr>
+              <a:t> para </a:t>
+            </a:r>
+            <a:r>
+              <a:rPr lang="en-US" sz="2100" dirty="0" err="1">
+                <a:solidFill>
+                  <a:srgbClr val="FFFFFF"/>
+                </a:solidFill>
+                <a:latin typeface="Courier Prime"/>
+                <a:ea typeface="Courier Prime"/>
+                <a:cs typeface="Courier Prime"/>
+                <a:sym typeface="Courier Prime"/>
+              </a:rPr>
+              <a:t>elegir</a:t>
+            </a:r>
+            <a:r>
+              <a:rPr lang="en-US" sz="2100" dirty="0">
+                <a:solidFill>
+                  <a:srgbClr val="FFFFFF"/>
+                </a:solidFill>
+                <a:latin typeface="Courier Prime"/>
+                <a:ea typeface="Courier Prime"/>
+                <a:cs typeface="Courier Prime"/>
+                <a:sym typeface="Courier Prime"/>
+              </a:rPr>
+              <a:t>.</a:t>
+            </a:r>
+          </a:p>
+        </p:txBody>
+      </p:sp>
+      <p:sp>
+        <p:nvSpPr>
+          <p:cNvPr id="24" name="AutoShape 11">
+            <a:extLst>
+              <a:ext uri="{FF2B5EF4-FFF2-40B4-BE49-F238E27FC236}">
+                <a16:creationId xmlns:a16="http://schemas.microsoft.com/office/drawing/2014/main" id="{75C023F1-7F57-AA32-829F-CC9110D774DA}"/>
+              </a:ext>
+            </a:extLst>
+          </p:cNvPr>
+          <p:cNvSpPr/>
           <p:nvPr/>
         </p:nvSpPr>
         <p:spPr>
-          <a:xfrm rot="0">
-            <a:off x="16557135" y="8675370"/>
-            <a:ext cx="702165" cy="582930"/>
+          <a:xfrm>
+            <a:off x="10665367" y="6680027"/>
+            <a:ext cx="2129" cy="3154594"/>
           </a:xfrm>
-          <a:prstGeom prst="rect">
+          <a:prstGeom prst="line">
             <a:avLst/>
           </a:prstGeom>
+          <a:ln w="76200" cap="flat">
+            <a:solidFill>
+              <a:srgbClr val="737373"/>
+            </a:solidFill>
+            <a:prstDash val="solid"/>
+            <a:headEnd type="none" w="sm" len="sm"/>
+            <a:tailEnd type="none" w="sm" len="sm"/>
+          </a:ln>
         </p:spPr>
-        <p:txBody>
-          <a:bodyPr anchor="t" rtlCol="false" tIns="0" lIns="0" bIns="0" rIns="0">
-            <a:spAutoFit/>
-          </a:bodyPr>
-          <a:lstStyle/>
-          <a:p>
-            <a:pPr algn="r">
-              <a:lnSpc>
-                <a:spcPts val="4559"/>
-              </a:lnSpc>
-            </a:pPr>
-            <a:r>
-              <a:rPr lang="en-US" sz="3999">
-                <a:solidFill>
-                  <a:srgbClr val="FFFFFF"/>
-                </a:solidFill>
-                <a:latin typeface="Courier Prime"/>
-                <a:ea typeface="Courier Prime"/>
-                <a:cs typeface="Courier Prime"/>
-                <a:sym typeface="Courier Prime"/>
-              </a:rPr>
-              <a:t>}</a:t>
-            </a:r>
-          </a:p>
-        </p:txBody>
+      </p:sp>
+      <p:sp>
+        <p:nvSpPr>
+          <p:cNvPr id="11" name="AutoShape 11"/>
+          <p:cNvSpPr/>
+          <p:nvPr/>
+        </p:nvSpPr>
+        <p:spPr>
+          <a:xfrm>
+            <a:off x="10665367" y="2731303"/>
+            <a:ext cx="14155" cy="3342106"/>
+          </a:xfrm>
+          <a:prstGeom prst="line">
+            <a:avLst/>
+          </a:prstGeom>
+          <a:ln w="76200" cap="flat">
+            <a:solidFill>
+              <a:srgbClr val="737373"/>
+            </a:solidFill>
+            <a:prstDash val="solid"/>
+            <a:headEnd type="none" w="sm" len="sm"/>
+            <a:tailEnd type="none" w="sm" len="sm"/>
+          </a:ln>
+        </p:spPr>
       </p:sp>
     </p:spTree>
   </p:cSld>
@@ -5016,13 +6807,14 @@
 </file>
 
 <file path=ppt/slides/slide5.xml><?xml version="1.0" encoding="utf-8"?>
-<p:sld xmlns:p="http://schemas.openxmlformats.org/presentationml/2006/main" xmlns:a="http://schemas.openxmlformats.org/drawingml/2006/main" xmlns:r="http://schemas.openxmlformats.org/officeDocument/2006/relationships">
+<p:sld xmlns:a="http://schemas.openxmlformats.org/drawingml/2006/main" xmlns:r="http://schemas.openxmlformats.org/officeDocument/2006/relationships" xmlns:p="http://schemas.openxmlformats.org/presentationml/2006/main">
   <p:cSld>
     <p:bg>
       <p:bgPr>
         <a:solidFill>
           <a:srgbClr val="20232A"/>
         </a:solidFill>
+        <a:effectLst/>
       </p:bgPr>
     </p:bg>
     <p:spTree>
@@ -5041,12 +6833,12 @@
       </p:grpSpPr>
       <p:sp>
         <p:nvSpPr>
-          <p:cNvPr name="Freeform 2" id="2"/>
+          <p:cNvPr id="2" name="Freeform 2"/>
           <p:cNvSpPr/>
           <p:nvPr/>
         </p:nvSpPr>
         <p:spPr>
-          <a:xfrm flipH="false" flipV="false" rot="0">
+          <a:xfrm>
             <a:off x="1028700" y="3659212"/>
             <a:ext cx="7175917" cy="2572121"/>
           </a:xfrm>
@@ -5055,9 +6847,9 @@
             <a:gdLst/>
             <a:ahLst/>
             <a:cxnLst/>
-            <a:rect r="r" b="b" t="t" l="l"/>
+            <a:rect l="l" t="t" r="r" b="b"/>
             <a:pathLst>
-              <a:path h="2572121" w="7175917">
+              <a:path w="7175917" h="2572121">
                 <a:moveTo>
                   <a:pt x="0" y="0"/>
                 </a:moveTo>
@@ -5080,28 +6872,28 @@
           <a:blipFill>
             <a:blip r:embed="rId2"/>
             <a:stretch>
-              <a:fillRect l="0" t="0" r="0" b="0"/>
+              <a:fillRect/>
             </a:stretch>
           </a:blipFill>
         </p:spPr>
       </p:sp>
       <p:sp>
         <p:nvSpPr>
-          <p:cNvPr name="TextBox 3" id="3"/>
-          <p:cNvSpPr txBox="true"/>
+          <p:cNvPr id="3" name="TextBox 3"/>
+          <p:cNvSpPr txBox="1"/>
           <p:nvPr/>
         </p:nvSpPr>
         <p:spPr>
-          <a:xfrm rot="0">
+          <a:xfrm>
             <a:off x="1028700" y="1047750"/>
-            <a:ext cx="7031406" cy="582930"/>
+            <a:ext cx="7031406" cy="596253"/>
           </a:xfrm>
           <a:prstGeom prst="rect">
             <a:avLst/>
           </a:prstGeom>
         </p:spPr>
         <p:txBody>
-          <a:bodyPr anchor="t" rtlCol="false" tIns="0" lIns="0" bIns="0" rIns="0">
+          <a:bodyPr lIns="0" tIns="0" rIns="0" bIns="0" rtlCol="0" anchor="t">
             <a:spAutoFit/>
           </a:bodyPr>
           <a:lstStyle/>
@@ -5112,28 +6904,61 @@
               </a:lnSpc>
             </a:pPr>
             <a:r>
-              <a:rPr lang="en-US" sz="3999">
-                <a:solidFill>
-                  <a:srgbClr val="FFFFFF"/>
-                </a:solidFill>
-                <a:latin typeface="Courier Prime"/>
-                <a:ea typeface="Courier Prime"/>
-                <a:cs typeface="Courier Prime"/>
-                <a:sym typeface="Courier Prime"/>
-              </a:rPr>
-              <a:t>Manejo de errores {</a:t>
-            </a:r>
-          </a:p>
-        </p:txBody>
-      </p:sp>
-      <p:sp>
-        <p:nvSpPr>
-          <p:cNvPr name="TextBox 4" id="4"/>
-          <p:cNvSpPr txBox="true"/>
+              <a:rPr lang="en-US" sz="3999" dirty="0" err="1">
+                <a:solidFill>
+                  <a:srgbClr val="FFFFFF"/>
+                </a:solidFill>
+                <a:latin typeface="Courier Prime"/>
+                <a:ea typeface="Courier Prime"/>
+                <a:cs typeface="Courier Prime"/>
+                <a:sym typeface="Courier Prime"/>
+              </a:rPr>
+              <a:t>Manejo</a:t>
+            </a:r>
+            <a:r>
+              <a:rPr lang="en-US" sz="3999" dirty="0">
+                <a:solidFill>
+                  <a:srgbClr val="FFFFFF"/>
+                </a:solidFill>
+                <a:latin typeface="Courier Prime"/>
+                <a:ea typeface="Courier Prime"/>
+                <a:cs typeface="Courier Prime"/>
+                <a:sym typeface="Courier Prime"/>
+              </a:rPr>
+              <a:t> de </a:t>
+            </a:r>
+            <a:r>
+              <a:rPr lang="en-US" sz="3999" dirty="0" err="1">
+                <a:solidFill>
+                  <a:srgbClr val="FFFFFF"/>
+                </a:solidFill>
+                <a:latin typeface="Courier Prime"/>
+                <a:ea typeface="Courier Prime"/>
+                <a:cs typeface="Courier Prime"/>
+                <a:sym typeface="Courier Prime"/>
+              </a:rPr>
+              <a:t>errores</a:t>
+            </a:r>
+            <a:endParaRPr lang="en-US" sz="3999" dirty="0">
+              <a:solidFill>
+                <a:srgbClr val="FFFFFF"/>
+              </a:solidFill>
+              <a:latin typeface="Courier Prime"/>
+              <a:ea typeface="Courier Prime"/>
+              <a:cs typeface="Courier Prime"/>
+              <a:sym typeface="Courier Prime"/>
+            </a:endParaRPr>
+          </a:p>
+        </p:txBody>
+      </p:sp>
+      <p:sp>
+        <p:nvSpPr>
+          <p:cNvPr id="4" name="TextBox 4"/>
+          <p:cNvSpPr txBox="1"/>
           <p:nvPr/>
         </p:nvSpPr>
         <p:spPr>
-          <a:xfrm rot="0">
+          <a:xfrm>
             <a:off x="906181" y="1897421"/>
             <a:ext cx="8603190" cy="1274064"/>
           </a:xfrm>
@@ -5142,7 +6967,7 @@
           </a:prstGeom>
         </p:spPr>
         <p:txBody>
-          <a:bodyPr anchor="t" rtlCol="false" tIns="0" lIns="0" bIns="0" rIns="0">
+          <a:bodyPr lIns="0" tIns="0" rIns="0" bIns="0" rtlCol="0" anchor="t">
             <a:spAutoFit/>
           </a:bodyPr>
           <a:lstStyle/>
@@ -5166,47 +6991,6 @@
                 <a:sym typeface="Courier Prime"/>
               </a:rPr>
               <a:t>Mediante las funciones nativas de Python como el “Try” y el “Except” pudimos evitar errores que finalizarían con el funcionamiento de nuestro programa, como por ejemplo:</a:t>
-            </a:r>
-          </a:p>
-        </p:txBody>
-      </p:sp>
-      <p:sp>
-        <p:nvSpPr>
-          <p:cNvPr name="TextBox 5" id="5"/>
-          <p:cNvSpPr txBox="true"/>
-          <p:nvPr/>
-        </p:nvSpPr>
-        <p:spPr>
-          <a:xfrm rot="0">
-            <a:off x="16557135" y="8675370"/>
-            <a:ext cx="702165" cy="582930"/>
-          </a:xfrm>
-          <a:prstGeom prst="rect">
-            <a:avLst/>
-          </a:prstGeom>
-        </p:spPr>
-        <p:txBody>
-          <a:bodyPr anchor="t" rtlCol="false" tIns="0" lIns="0" bIns="0" rIns="0">
-            <a:spAutoFit/>
-          </a:bodyPr>
-          <a:lstStyle/>
-          <a:p>
-            <a:pPr algn="r">
-              <a:lnSpc>
-                <a:spcPts val="4559"/>
-              </a:lnSpc>
-            </a:pPr>
-            <a:r>
-              <a:rPr lang="en-US" sz="3999">
-                <a:solidFill>
-                  <a:srgbClr val="FFFFFF"/>
-                </a:solidFill>
-                <a:latin typeface="Courier Prime"/>
-                <a:ea typeface="Courier Prime"/>
-                <a:cs typeface="Courier Prime"/>
-                <a:sym typeface="Courier Prime"/>
-              </a:rPr>
-              <a:t>}</a:t>
             </a:r>
           </a:p>
         </p:txBody>
